--- a/docs/pptx/carbo/ritu-carbo-linsubhr-sens-akikdigo_10pct.pptx
+++ b/docs/pptx/carbo/ritu-carbo-linsubhr-sens-akikdigo_10pct.pptx
@@ -2443,7 +2443,7 @@
           </p:nvSpPr>
           <p:spPr>
             <a:xfrm>
-              <a:off x="1325501" y="2073503"/>
+              <a:off x="1325928" y="2073503"/>
               <a:ext cx="0" cy="3649639"/>
             </a:xfrm>
             <a:custGeom>
@@ -2486,7 +2486,7 @@
           </p:nvSpPr>
           <p:spPr>
             <a:xfrm>
-              <a:off x="2239092" y="2073503"/>
+              <a:off x="2237914" y="2073503"/>
               <a:ext cx="0" cy="3649639"/>
             </a:xfrm>
             <a:custGeom>
@@ -2529,7 +2529,7 @@
           </p:nvSpPr>
           <p:spPr>
             <a:xfrm>
-              <a:off x="3152683" y="2073503"/>
+              <a:off x="3149900" y="2073503"/>
               <a:ext cx="0" cy="3649639"/>
             </a:xfrm>
             <a:custGeom>
@@ -2572,7 +2572,7 @@
           </p:nvSpPr>
           <p:spPr>
             <a:xfrm>
-              <a:off x="4066274" y="2073503"/>
+              <a:off x="4061886" y="2073503"/>
               <a:ext cx="0" cy="3649639"/>
             </a:xfrm>
             <a:custGeom>
@@ -2615,7 +2615,7 @@
           </p:nvSpPr>
           <p:spPr>
             <a:xfrm>
-              <a:off x="4979865" y="2073503"/>
+              <a:off x="4973872" y="2073503"/>
               <a:ext cx="0" cy="3649639"/>
             </a:xfrm>
             <a:custGeom>
@@ -2658,7 +2658,7 @@
           </p:nvSpPr>
           <p:spPr>
             <a:xfrm>
-              <a:off x="5893456" y="2073503"/>
+              <a:off x="5885859" y="2073503"/>
               <a:ext cx="0" cy="3649639"/>
             </a:xfrm>
             <a:custGeom>
@@ -2701,7 +2701,7 @@
           </p:nvSpPr>
           <p:spPr>
             <a:xfrm>
-              <a:off x="6807046" y="2073503"/>
+              <a:off x="6797845" y="2073503"/>
               <a:ext cx="0" cy="3649639"/>
             </a:xfrm>
             <a:custGeom>
@@ -2744,7 +2744,7 @@
           </p:nvSpPr>
           <p:spPr>
             <a:xfrm>
-              <a:off x="7720637" y="2073503"/>
+              <a:off x="7709831" y="2073503"/>
               <a:ext cx="0" cy="3649639"/>
             </a:xfrm>
             <a:custGeom>
@@ -3002,7 +3002,7 @@
           </p:nvSpPr>
           <p:spPr>
             <a:xfrm>
-              <a:off x="868706" y="2073503"/>
+              <a:off x="869934" y="2073503"/>
               <a:ext cx="0" cy="3649639"/>
             </a:xfrm>
             <a:custGeom>
@@ -3045,7 +3045,7 @@
           </p:nvSpPr>
           <p:spPr>
             <a:xfrm>
-              <a:off x="1782297" y="2073503"/>
+              <a:off x="1781921" y="2073503"/>
               <a:ext cx="0" cy="3649639"/>
             </a:xfrm>
             <a:custGeom>
@@ -3088,7 +3088,7 @@
           </p:nvSpPr>
           <p:spPr>
             <a:xfrm>
-              <a:off x="2695888" y="2073503"/>
+              <a:off x="2693907" y="2073503"/>
               <a:ext cx="0" cy="3649639"/>
             </a:xfrm>
             <a:custGeom>
@@ -3131,7 +3131,7 @@
           </p:nvSpPr>
           <p:spPr>
             <a:xfrm>
-              <a:off x="3609478" y="2073503"/>
+              <a:off x="3605893" y="2073503"/>
               <a:ext cx="0" cy="3649639"/>
             </a:xfrm>
             <a:custGeom>
@@ -3174,7 +3174,7 @@
           </p:nvSpPr>
           <p:spPr>
             <a:xfrm>
-              <a:off x="4523069" y="2073503"/>
+              <a:off x="4517879" y="2073503"/>
               <a:ext cx="0" cy="3649639"/>
             </a:xfrm>
             <a:custGeom>
@@ -3217,7 +3217,7 @@
           </p:nvSpPr>
           <p:spPr>
             <a:xfrm>
-              <a:off x="5436660" y="2073503"/>
+              <a:off x="5429866" y="2073503"/>
               <a:ext cx="0" cy="3649639"/>
             </a:xfrm>
             <a:custGeom>
@@ -3260,7 +3260,7 @@
           </p:nvSpPr>
           <p:spPr>
             <a:xfrm>
-              <a:off x="6350251" y="2073503"/>
+              <a:off x="6341852" y="2073503"/>
               <a:ext cx="0" cy="3649639"/>
             </a:xfrm>
             <a:custGeom>
@@ -3303,7 +3303,7 @@
           </p:nvSpPr>
           <p:spPr>
             <a:xfrm>
-              <a:off x="7263842" y="2073503"/>
+              <a:off x="7253838" y="2073503"/>
               <a:ext cx="0" cy="3649639"/>
             </a:xfrm>
             <a:custGeom>
@@ -3346,7 +3346,7 @@
           </p:nvSpPr>
           <p:spPr>
             <a:xfrm>
-              <a:off x="8177433" y="2073503"/>
+              <a:off x="8165824" y="2073503"/>
               <a:ext cx="0" cy="3649639"/>
             </a:xfrm>
             <a:custGeom>
@@ -3390,530 +3390,527 @@
           <p:spPr>
             <a:xfrm>
               <a:off x="1172049" y="2073503"/>
-              <a:ext cx="7090630" cy="3460275"/>
+              <a:ext cx="7090630" cy="3460058"/>
             </a:xfrm>
             <a:custGeom>
               <a:avLst/>
               <a:pathLst>
-                <a:path w="7090630" h="3460275">
+                <a:path w="7090630" h="3460058">
                   <a:moveTo>
-                    <a:pt x="1999721" y="0"/>
+                    <a:pt x="2018194" y="0"/>
                   </a:moveTo>
                   <a:lnTo>
-                    <a:pt x="2005430" y="20120"/>
-                  </a:lnTo>
-                  <a:lnTo>
-                    <a:pt x="2077053" y="255388"/>
-                  </a:lnTo>
-                  <a:lnTo>
-                    <a:pt x="2148675" y="474674"/>
-                  </a:lnTo>
-                  <a:lnTo>
-                    <a:pt x="2220298" y="679066"/>
-                  </a:lnTo>
-                  <a:lnTo>
-                    <a:pt x="2291920" y="869574"/>
-                  </a:lnTo>
-                  <a:lnTo>
-                    <a:pt x="2363543" y="1047142"/>
-                  </a:lnTo>
-                  <a:lnTo>
-                    <a:pt x="2435165" y="1212649"/>
-                  </a:lnTo>
-                  <a:lnTo>
-                    <a:pt x="2506788" y="1366913"/>
-                  </a:lnTo>
-                  <a:lnTo>
-                    <a:pt x="2578410" y="1510699"/>
-                  </a:lnTo>
-                  <a:lnTo>
-                    <a:pt x="2650033" y="1644719"/>
-                  </a:lnTo>
-                  <a:lnTo>
-                    <a:pt x="2721655" y="1769635"/>
-                  </a:lnTo>
-                  <a:lnTo>
-                    <a:pt x="2793278" y="1886066"/>
-                  </a:lnTo>
-                  <a:lnTo>
-                    <a:pt x="2864901" y="1994589"/>
-                  </a:lnTo>
-                  <a:lnTo>
-                    <a:pt x="2936523" y="2095740"/>
-                  </a:lnTo>
-                  <a:lnTo>
-                    <a:pt x="3008146" y="2190020"/>
-                  </a:lnTo>
-                  <a:lnTo>
-                    <a:pt x="3079768" y="2277897"/>
-                  </a:lnTo>
-                  <a:lnTo>
-                    <a:pt x="3151391" y="2359804"/>
-                  </a:lnTo>
-                  <a:lnTo>
-                    <a:pt x="3223013" y="2436148"/>
-                  </a:lnTo>
-                  <a:lnTo>
-                    <a:pt x="3294636" y="2507306"/>
-                  </a:lnTo>
-                  <a:lnTo>
-                    <a:pt x="3366258" y="2573631"/>
-                  </a:lnTo>
-                  <a:lnTo>
-                    <a:pt x="3437881" y="2635451"/>
-                  </a:lnTo>
-                  <a:lnTo>
-                    <a:pt x="3509503" y="2651530"/>
-                  </a:lnTo>
-                  <a:lnTo>
-                    <a:pt x="3581126" y="2647470"/>
-                  </a:lnTo>
-                  <a:lnTo>
-                    <a:pt x="3652748" y="2643391"/>
-                  </a:lnTo>
-                  <a:lnTo>
-                    <a:pt x="3724371" y="2639291"/>
-                  </a:lnTo>
-                  <a:lnTo>
-                    <a:pt x="3795993" y="2635172"/>
-                  </a:lnTo>
-                  <a:lnTo>
-                    <a:pt x="3867616" y="2631033"/>
-                  </a:lnTo>
-                  <a:lnTo>
-                    <a:pt x="3939238" y="2626873"/>
-                  </a:lnTo>
-                  <a:lnTo>
-                    <a:pt x="4010861" y="2622693"/>
-                  </a:lnTo>
-                  <a:lnTo>
-                    <a:pt x="4082483" y="2618492"/>
-                  </a:lnTo>
-                  <a:lnTo>
-                    <a:pt x="4154106" y="2614272"/>
-                  </a:lnTo>
-                  <a:lnTo>
-                    <a:pt x="4225729" y="2610030"/>
-                  </a:lnTo>
-                  <a:lnTo>
-                    <a:pt x="4297351" y="2605768"/>
-                  </a:lnTo>
-                  <a:lnTo>
-                    <a:pt x="4368974" y="2601485"/>
-                  </a:lnTo>
-                  <a:lnTo>
-                    <a:pt x="4440596" y="2597181"/>
-                  </a:lnTo>
-                  <a:lnTo>
-                    <a:pt x="4512219" y="2592856"/>
-                  </a:lnTo>
-                  <a:lnTo>
-                    <a:pt x="4583841" y="2588510"/>
-                  </a:lnTo>
-                  <a:lnTo>
-                    <a:pt x="4655464" y="2584143"/>
-                  </a:lnTo>
-                  <a:lnTo>
-                    <a:pt x="4727086" y="2579755"/>
-                  </a:lnTo>
-                  <a:lnTo>
-                    <a:pt x="4798709" y="2575345"/>
-                  </a:lnTo>
-                  <a:lnTo>
-                    <a:pt x="4870331" y="2570914"/>
-                  </a:lnTo>
-                  <a:lnTo>
-                    <a:pt x="4941954" y="2566461"/>
-                  </a:lnTo>
-                  <a:lnTo>
-                    <a:pt x="5013576" y="2561986"/>
-                  </a:lnTo>
-                  <a:lnTo>
-                    <a:pt x="5085199" y="2557489"/>
-                  </a:lnTo>
-                  <a:lnTo>
-                    <a:pt x="5156821" y="2552971"/>
-                  </a:lnTo>
-                  <a:lnTo>
-                    <a:pt x="5228444" y="2548431"/>
-                  </a:lnTo>
-                  <a:lnTo>
-                    <a:pt x="5300066" y="2543868"/>
-                  </a:lnTo>
-                  <a:lnTo>
-                    <a:pt x="5371689" y="2539283"/>
-                  </a:lnTo>
-                  <a:lnTo>
-                    <a:pt x="5443311" y="2534676"/>
-                  </a:lnTo>
-                  <a:lnTo>
-                    <a:pt x="5514934" y="2530046"/>
-                  </a:lnTo>
-                  <a:lnTo>
-                    <a:pt x="5586557" y="2525394"/>
-                  </a:lnTo>
-                  <a:lnTo>
-                    <a:pt x="5658179" y="2520719"/>
-                  </a:lnTo>
-                  <a:lnTo>
-                    <a:pt x="5729802" y="2516021"/>
-                  </a:lnTo>
-                  <a:lnTo>
-                    <a:pt x="5801424" y="2511300"/>
-                  </a:lnTo>
-                  <a:lnTo>
-                    <a:pt x="5873047" y="2506556"/>
-                  </a:lnTo>
-                  <a:lnTo>
-                    <a:pt x="5944669" y="2501789"/>
-                  </a:lnTo>
-                  <a:lnTo>
-                    <a:pt x="6016292" y="2496999"/>
-                  </a:lnTo>
-                  <a:lnTo>
-                    <a:pt x="6087914" y="2492186"/>
-                  </a:lnTo>
-                  <a:lnTo>
-                    <a:pt x="6159537" y="2487349"/>
-                  </a:lnTo>
-                  <a:lnTo>
-                    <a:pt x="6231159" y="2482488"/>
-                  </a:lnTo>
-                  <a:lnTo>
-                    <a:pt x="6302782" y="2477604"/>
-                  </a:lnTo>
-                  <a:lnTo>
-                    <a:pt x="6374404" y="2472695"/>
-                  </a:lnTo>
-                  <a:lnTo>
-                    <a:pt x="6446027" y="2467763"/>
-                  </a:lnTo>
-                  <a:lnTo>
-                    <a:pt x="6517649" y="2462807"/>
-                  </a:lnTo>
-                  <a:lnTo>
-                    <a:pt x="6589272" y="2457827"/>
-                  </a:lnTo>
-                  <a:lnTo>
-                    <a:pt x="6660894" y="2452822"/>
-                  </a:lnTo>
-                  <a:lnTo>
-                    <a:pt x="6732517" y="2447793"/>
-                  </a:lnTo>
-                  <a:lnTo>
-                    <a:pt x="6804139" y="2442740"/>
-                  </a:lnTo>
-                  <a:lnTo>
-                    <a:pt x="6875762" y="2437661"/>
-                  </a:lnTo>
-                  <a:lnTo>
-                    <a:pt x="6947385" y="2432558"/>
-                  </a:lnTo>
-                  <a:lnTo>
-                    <a:pt x="7019007" y="2427430"/>
-                  </a:lnTo>
-                  <a:lnTo>
-                    <a:pt x="7090630" y="2422278"/>
-                  </a:lnTo>
-                  <a:lnTo>
-                    <a:pt x="7090630" y="3460275"/>
-                  </a:lnTo>
-                  <a:lnTo>
-                    <a:pt x="7019007" y="3458565"/>
-                  </a:lnTo>
-                  <a:lnTo>
-                    <a:pt x="6947385" y="3456729"/>
-                  </a:lnTo>
-                  <a:lnTo>
-                    <a:pt x="6875762" y="3454761"/>
-                  </a:lnTo>
-                  <a:lnTo>
-                    <a:pt x="6804139" y="3452648"/>
-                  </a:lnTo>
-                  <a:lnTo>
-                    <a:pt x="6732517" y="3450382"/>
-                  </a:lnTo>
-                  <a:lnTo>
-                    <a:pt x="6660894" y="3447950"/>
-                  </a:lnTo>
-                  <a:lnTo>
-                    <a:pt x="6589272" y="3445342"/>
-                  </a:lnTo>
-                  <a:lnTo>
-                    <a:pt x="6517649" y="3442543"/>
-                  </a:lnTo>
-                  <a:lnTo>
-                    <a:pt x="6446027" y="3439540"/>
-                  </a:lnTo>
-                  <a:lnTo>
-                    <a:pt x="6374404" y="3436319"/>
-                  </a:lnTo>
-                  <a:lnTo>
-                    <a:pt x="6302782" y="3432863"/>
-                  </a:lnTo>
-                  <a:lnTo>
-                    <a:pt x="6231159" y="3429154"/>
-                  </a:lnTo>
-                  <a:lnTo>
-                    <a:pt x="6159537" y="3425176"/>
-                  </a:lnTo>
-                  <a:lnTo>
-                    <a:pt x="6087914" y="3420908"/>
-                  </a:lnTo>
-                  <a:lnTo>
-                    <a:pt x="6016292" y="3416328"/>
-                  </a:lnTo>
-                  <a:lnTo>
-                    <a:pt x="5944669" y="3411415"/>
-                  </a:lnTo>
-                  <a:lnTo>
-                    <a:pt x="5873047" y="3406144"/>
-                  </a:lnTo>
-                  <a:lnTo>
-                    <a:pt x="5801424" y="3400489"/>
-                  </a:lnTo>
-                  <a:lnTo>
-                    <a:pt x="5729802" y="3394421"/>
-                  </a:lnTo>
-                  <a:lnTo>
-                    <a:pt x="5658179" y="3387912"/>
-                  </a:lnTo>
-                  <a:lnTo>
-                    <a:pt x="5586557" y="3380928"/>
-                  </a:lnTo>
-                  <a:lnTo>
-                    <a:pt x="5514934" y="3373435"/>
-                  </a:lnTo>
-                  <a:lnTo>
-                    <a:pt x="5443311" y="3365396"/>
-                  </a:lnTo>
-                  <a:lnTo>
-                    <a:pt x="5371689" y="3356771"/>
-                  </a:lnTo>
-                  <a:lnTo>
-                    <a:pt x="5300066" y="3347518"/>
-                  </a:lnTo>
-                  <a:lnTo>
-                    <a:pt x="5228444" y="3337590"/>
-                  </a:lnTo>
-                  <a:lnTo>
-                    <a:pt x="5156821" y="3326939"/>
-                  </a:lnTo>
-                  <a:lnTo>
-                    <a:pt x="5085199" y="3315512"/>
-                  </a:lnTo>
-                  <a:lnTo>
-                    <a:pt x="5013576" y="3303251"/>
-                  </a:lnTo>
-                  <a:lnTo>
-                    <a:pt x="4941954" y="3290098"/>
-                  </a:lnTo>
-                  <a:lnTo>
-                    <a:pt x="4870331" y="3275986"/>
-                  </a:lnTo>
-                  <a:lnTo>
-                    <a:pt x="4798709" y="3260845"/>
-                  </a:lnTo>
-                  <a:lnTo>
-                    <a:pt x="4727086" y="3244601"/>
-                  </a:lnTo>
-                  <a:lnTo>
-                    <a:pt x="4655464" y="3227173"/>
-                  </a:lnTo>
-                  <a:lnTo>
-                    <a:pt x="4583841" y="3208476"/>
-                  </a:lnTo>
-                  <a:lnTo>
-                    <a:pt x="4512219" y="3188415"/>
-                  </a:lnTo>
-                  <a:lnTo>
-                    <a:pt x="4440596" y="3166893"/>
-                  </a:lnTo>
-                  <a:lnTo>
-                    <a:pt x="4368974" y="3143802"/>
-                  </a:lnTo>
-                  <a:lnTo>
-                    <a:pt x="4297351" y="3119029"/>
-                  </a:lnTo>
-                  <a:lnTo>
-                    <a:pt x="4225729" y="3092450"/>
-                  </a:lnTo>
-                  <a:lnTo>
-                    <a:pt x="4154106" y="3063934"/>
-                  </a:lnTo>
-                  <a:lnTo>
-                    <a:pt x="4082483" y="3033340"/>
-                  </a:lnTo>
-                  <a:lnTo>
-                    <a:pt x="4010861" y="3000517"/>
-                  </a:lnTo>
-                  <a:lnTo>
-                    <a:pt x="3939238" y="2965301"/>
-                  </a:lnTo>
-                  <a:lnTo>
-                    <a:pt x="3867616" y="2927519"/>
-                  </a:lnTo>
-                  <a:lnTo>
-                    <a:pt x="3795993" y="2886984"/>
-                  </a:lnTo>
-                  <a:lnTo>
-                    <a:pt x="3724371" y="2843495"/>
-                  </a:lnTo>
-                  <a:lnTo>
-                    <a:pt x="3652748" y="2796837"/>
-                  </a:lnTo>
-                  <a:lnTo>
-                    <a:pt x="3581126" y="2746778"/>
-                  </a:lnTo>
-                  <a:lnTo>
-                    <a:pt x="3509503" y="2693071"/>
-                  </a:lnTo>
-                  <a:lnTo>
-                    <a:pt x="3437881" y="2655570"/>
-                  </a:lnTo>
-                  <a:lnTo>
-                    <a:pt x="3366258" y="2659590"/>
-                  </a:lnTo>
-                  <a:lnTo>
-                    <a:pt x="3294636" y="2663591"/>
-                  </a:lnTo>
-                  <a:lnTo>
-                    <a:pt x="3223013" y="2667573"/>
-                  </a:lnTo>
-                  <a:lnTo>
-                    <a:pt x="3151391" y="2671535"/>
-                  </a:lnTo>
-                  <a:lnTo>
-                    <a:pt x="3079768" y="2675478"/>
-                  </a:lnTo>
-                  <a:lnTo>
-                    <a:pt x="3008146" y="2679402"/>
-                  </a:lnTo>
-                  <a:lnTo>
-                    <a:pt x="2936523" y="2683306"/>
-                  </a:lnTo>
-                  <a:lnTo>
-                    <a:pt x="2864901" y="2687192"/>
-                  </a:lnTo>
-                  <a:lnTo>
-                    <a:pt x="2793278" y="2691059"/>
-                  </a:lnTo>
-                  <a:lnTo>
-                    <a:pt x="2721655" y="2694907"/>
-                  </a:lnTo>
-                  <a:lnTo>
-                    <a:pt x="2650033" y="2698736"/>
-                  </a:lnTo>
-                  <a:lnTo>
-                    <a:pt x="2578410" y="2702547"/>
-                  </a:lnTo>
-                  <a:lnTo>
-                    <a:pt x="2506788" y="2706340"/>
-                  </a:lnTo>
-                  <a:lnTo>
-                    <a:pt x="2435165" y="2710114"/>
-                  </a:lnTo>
-                  <a:lnTo>
-                    <a:pt x="2363543" y="2713869"/>
-                  </a:lnTo>
-                  <a:lnTo>
-                    <a:pt x="2291920" y="2717607"/>
-                  </a:lnTo>
-                  <a:lnTo>
-                    <a:pt x="2220298" y="2721326"/>
-                  </a:lnTo>
-                  <a:lnTo>
-                    <a:pt x="2148675" y="2725027"/>
-                  </a:lnTo>
-                  <a:lnTo>
-                    <a:pt x="2077053" y="2728710"/>
-                  </a:lnTo>
-                  <a:lnTo>
-                    <a:pt x="2005430" y="2732375"/>
-                  </a:lnTo>
-                  <a:lnTo>
-                    <a:pt x="1933808" y="2736023"/>
-                  </a:lnTo>
-                  <a:lnTo>
-                    <a:pt x="1862185" y="2739653"/>
-                  </a:lnTo>
-                  <a:lnTo>
-                    <a:pt x="1790563" y="2743265"/>
-                  </a:lnTo>
-                  <a:lnTo>
-                    <a:pt x="1718940" y="2746860"/>
-                  </a:lnTo>
-                  <a:lnTo>
-                    <a:pt x="1647318" y="2750437"/>
-                  </a:lnTo>
-                  <a:lnTo>
-                    <a:pt x="1575695" y="2753997"/>
-                  </a:lnTo>
-                  <a:lnTo>
-                    <a:pt x="1504073" y="2757539"/>
-                  </a:lnTo>
-                  <a:lnTo>
-                    <a:pt x="1432450" y="2761065"/>
-                  </a:lnTo>
-                  <a:lnTo>
-                    <a:pt x="1360827" y="2764573"/>
-                  </a:lnTo>
-                  <a:lnTo>
-                    <a:pt x="1289205" y="2768064"/>
-                  </a:lnTo>
-                  <a:lnTo>
-                    <a:pt x="1217582" y="2771539"/>
-                  </a:lnTo>
-                  <a:lnTo>
-                    <a:pt x="1145960" y="2774996"/>
-                  </a:lnTo>
-                  <a:lnTo>
-                    <a:pt x="1074337" y="2778437"/>
-                  </a:lnTo>
-                  <a:lnTo>
-                    <a:pt x="1002715" y="2781861"/>
-                  </a:lnTo>
-                  <a:lnTo>
-                    <a:pt x="931092" y="2785268"/>
-                  </a:lnTo>
-                  <a:lnTo>
-                    <a:pt x="859470" y="2788659"/>
-                  </a:lnTo>
-                  <a:lnTo>
-                    <a:pt x="787847" y="2792033"/>
-                  </a:lnTo>
-                  <a:lnTo>
-                    <a:pt x="716225" y="2795391"/>
-                  </a:lnTo>
-                  <a:lnTo>
-                    <a:pt x="644602" y="2798733"/>
-                  </a:lnTo>
-                  <a:lnTo>
-                    <a:pt x="572980" y="2802058"/>
-                  </a:lnTo>
-                  <a:lnTo>
-                    <a:pt x="501357" y="2805367"/>
-                  </a:lnTo>
-                  <a:lnTo>
-                    <a:pt x="429735" y="2808660"/>
-                  </a:lnTo>
-                  <a:lnTo>
-                    <a:pt x="358112" y="2811938"/>
-                  </a:lnTo>
-                  <a:lnTo>
-                    <a:pt x="286490" y="2815199"/>
-                  </a:lnTo>
-                  <a:lnTo>
-                    <a:pt x="214867" y="2818444"/>
-                  </a:lnTo>
-                  <a:lnTo>
-                    <a:pt x="143245" y="2821674"/>
-                  </a:lnTo>
-                  <a:lnTo>
-                    <a:pt x="71622" y="2824888"/>
-                  </a:lnTo>
-                  <a:lnTo>
-                    <a:pt x="0" y="2828087"/>
+                    <a:pt x="2077053" y="197184"/>
+                  </a:lnTo>
+                  <a:lnTo>
+                    <a:pt x="2148675" y="420803"/>
+                  </a:lnTo>
+                  <a:lnTo>
+                    <a:pt x="2220298" y="629207"/>
+                  </a:lnTo>
+                  <a:lnTo>
+                    <a:pt x="2291920" y="823431"/>
+                  </a:lnTo>
+                  <a:lnTo>
+                    <a:pt x="2363543" y="1004440"/>
+                  </a:lnTo>
+                  <a:lnTo>
+                    <a:pt x="2435165" y="1173134"/>
+                  </a:lnTo>
+                  <a:lnTo>
+                    <a:pt x="2506788" y="1330349"/>
+                  </a:lnTo>
+                  <a:lnTo>
+                    <a:pt x="2578410" y="1476867"/>
+                  </a:lnTo>
+                  <a:lnTo>
+                    <a:pt x="2650033" y="1613416"/>
+                  </a:lnTo>
+                  <a:lnTo>
+                    <a:pt x="2721655" y="1740674"/>
+                  </a:lnTo>
+                  <a:lnTo>
+                    <a:pt x="2793278" y="1859273"/>
+                  </a:lnTo>
+                  <a:lnTo>
+                    <a:pt x="2864901" y="1969803"/>
+                  </a:lnTo>
+                  <a:lnTo>
+                    <a:pt x="2936523" y="2072813"/>
+                  </a:lnTo>
+                  <a:lnTo>
+                    <a:pt x="3008146" y="2168813"/>
+                  </a:lnTo>
+                  <a:lnTo>
+                    <a:pt x="3079768" y="2258282"/>
+                  </a:lnTo>
+                  <a:lnTo>
+                    <a:pt x="3151391" y="2341663"/>
+                  </a:lnTo>
+                  <a:lnTo>
+                    <a:pt x="3223013" y="2419371"/>
+                  </a:lnTo>
+                  <a:lnTo>
+                    <a:pt x="3294636" y="2491791"/>
+                  </a:lnTo>
+                  <a:lnTo>
+                    <a:pt x="3366258" y="2559284"/>
+                  </a:lnTo>
+                  <a:lnTo>
+                    <a:pt x="3437881" y="2622185"/>
+                  </a:lnTo>
+                  <a:lnTo>
+                    <a:pt x="3509503" y="2652416"/>
+                  </a:lnTo>
+                  <a:lnTo>
+                    <a:pt x="3581126" y="2648353"/>
+                  </a:lnTo>
+                  <a:lnTo>
+                    <a:pt x="3652748" y="2644271"/>
+                  </a:lnTo>
+                  <a:lnTo>
+                    <a:pt x="3724371" y="2640169"/>
+                  </a:lnTo>
+                  <a:lnTo>
+                    <a:pt x="3795993" y="2636046"/>
+                  </a:lnTo>
+                  <a:lnTo>
+                    <a:pt x="3867616" y="2631904"/>
+                  </a:lnTo>
+                  <a:lnTo>
+                    <a:pt x="3939238" y="2627741"/>
+                  </a:lnTo>
+                  <a:lnTo>
+                    <a:pt x="4010861" y="2623558"/>
+                  </a:lnTo>
+                  <a:lnTo>
+                    <a:pt x="4082483" y="2619354"/>
+                  </a:lnTo>
+                  <a:lnTo>
+                    <a:pt x="4154106" y="2615130"/>
+                  </a:lnTo>
+                  <a:lnTo>
+                    <a:pt x="4225729" y="2610886"/>
+                  </a:lnTo>
+                  <a:lnTo>
+                    <a:pt x="4297351" y="2606620"/>
+                  </a:lnTo>
+                  <a:lnTo>
+                    <a:pt x="4368974" y="2602334"/>
+                  </a:lnTo>
+                  <a:lnTo>
+                    <a:pt x="4440596" y="2598026"/>
+                  </a:lnTo>
+                  <a:lnTo>
+                    <a:pt x="4512219" y="2593698"/>
+                  </a:lnTo>
+                  <a:lnTo>
+                    <a:pt x="4583841" y="2589349"/>
+                  </a:lnTo>
+                  <a:lnTo>
+                    <a:pt x="4655464" y="2584978"/>
+                  </a:lnTo>
+                  <a:lnTo>
+                    <a:pt x="4727086" y="2580586"/>
+                  </a:lnTo>
+                  <a:lnTo>
+                    <a:pt x="4798709" y="2576172"/>
+                  </a:lnTo>
+                  <a:lnTo>
+                    <a:pt x="4870331" y="2571737"/>
+                  </a:lnTo>
+                  <a:lnTo>
+                    <a:pt x="4941954" y="2567280"/>
+                  </a:lnTo>
+                  <a:lnTo>
+                    <a:pt x="5013576" y="2562802"/>
+                  </a:lnTo>
+                  <a:lnTo>
+                    <a:pt x="5085199" y="2558301"/>
+                  </a:lnTo>
+                  <a:lnTo>
+                    <a:pt x="5156821" y="2553779"/>
+                  </a:lnTo>
+                  <a:lnTo>
+                    <a:pt x="5228444" y="2549234"/>
+                  </a:lnTo>
+                  <a:lnTo>
+                    <a:pt x="5300066" y="2544668"/>
+                  </a:lnTo>
+                  <a:lnTo>
+                    <a:pt x="5371689" y="2540079"/>
+                  </a:lnTo>
+                  <a:lnTo>
+                    <a:pt x="5443311" y="2535467"/>
+                  </a:lnTo>
+                  <a:lnTo>
+                    <a:pt x="5514934" y="2530833"/>
+                  </a:lnTo>
+                  <a:lnTo>
+                    <a:pt x="5586557" y="2526176"/>
+                  </a:lnTo>
+                  <a:lnTo>
+                    <a:pt x="5658179" y="2521497"/>
+                  </a:lnTo>
+                  <a:lnTo>
+                    <a:pt x="5729802" y="2516795"/>
+                  </a:lnTo>
+                  <a:lnTo>
+                    <a:pt x="5801424" y="2512069"/>
+                  </a:lnTo>
+                  <a:lnTo>
+                    <a:pt x="5873047" y="2507321"/>
+                  </a:lnTo>
+                  <a:lnTo>
+                    <a:pt x="5944669" y="2502549"/>
+                  </a:lnTo>
+                  <a:lnTo>
+                    <a:pt x="6016292" y="2497755"/>
+                  </a:lnTo>
+                  <a:lnTo>
+                    <a:pt x="6087914" y="2492936"/>
+                  </a:lnTo>
+                  <a:lnTo>
+                    <a:pt x="6159537" y="2488094"/>
+                  </a:lnTo>
+                  <a:lnTo>
+                    <a:pt x="6231159" y="2483229"/>
+                  </a:lnTo>
+                  <a:lnTo>
+                    <a:pt x="6302782" y="2478340"/>
+                  </a:lnTo>
+                  <a:lnTo>
+                    <a:pt x="6374404" y="2473426"/>
+                  </a:lnTo>
+                  <a:lnTo>
+                    <a:pt x="6446027" y="2468489"/>
+                  </a:lnTo>
+                  <a:lnTo>
+                    <a:pt x="6517649" y="2463528"/>
+                  </a:lnTo>
+                  <a:lnTo>
+                    <a:pt x="6589272" y="2458542"/>
+                  </a:lnTo>
+                  <a:lnTo>
+                    <a:pt x="6660894" y="2453532"/>
+                  </a:lnTo>
+                  <a:lnTo>
+                    <a:pt x="6732517" y="2448498"/>
+                  </a:lnTo>
+                  <a:lnTo>
+                    <a:pt x="6804139" y="2443439"/>
+                  </a:lnTo>
+                  <a:lnTo>
+                    <a:pt x="6875762" y="2438355"/>
+                  </a:lnTo>
+                  <a:lnTo>
+                    <a:pt x="6947385" y="2433246"/>
+                  </a:lnTo>
+                  <a:lnTo>
+                    <a:pt x="7019007" y="2428113"/>
+                  </a:lnTo>
+                  <a:lnTo>
+                    <a:pt x="7090630" y="2422954"/>
+                  </a:lnTo>
+                  <a:lnTo>
+                    <a:pt x="7090630" y="3460058"/>
+                  </a:lnTo>
+                  <a:lnTo>
+                    <a:pt x="7019007" y="3458329"/>
+                  </a:lnTo>
+                  <a:lnTo>
+                    <a:pt x="6947385" y="3456473"/>
+                  </a:lnTo>
+                  <a:lnTo>
+                    <a:pt x="6875762" y="3454482"/>
+                  </a:lnTo>
+                  <a:lnTo>
+                    <a:pt x="6804139" y="3452345"/>
+                  </a:lnTo>
+                  <a:lnTo>
+                    <a:pt x="6732517" y="3450053"/>
+                  </a:lnTo>
+                  <a:lnTo>
+                    <a:pt x="6660894" y="3447593"/>
+                  </a:lnTo>
+                  <a:lnTo>
+                    <a:pt x="6589272" y="3444953"/>
+                  </a:lnTo>
+                  <a:lnTo>
+                    <a:pt x="6517649" y="3442121"/>
+                  </a:lnTo>
+                  <a:lnTo>
+                    <a:pt x="6446027" y="3439082"/>
+                  </a:lnTo>
+                  <a:lnTo>
+                    <a:pt x="6374404" y="3435821"/>
+                  </a:lnTo>
+                  <a:lnTo>
+                    <a:pt x="6302782" y="3432322"/>
+                  </a:lnTo>
+                  <a:lnTo>
+                    <a:pt x="6231159" y="3428568"/>
+                  </a:lnTo>
+                  <a:lnTo>
+                    <a:pt x="6159537" y="3424539"/>
+                  </a:lnTo>
+                  <a:lnTo>
+                    <a:pt x="6087914" y="3420217"/>
+                  </a:lnTo>
+                  <a:lnTo>
+                    <a:pt x="6016292" y="3415578"/>
+                  </a:lnTo>
+                  <a:lnTo>
+                    <a:pt x="5944669" y="3410602"/>
+                  </a:lnTo>
+                  <a:lnTo>
+                    <a:pt x="5873047" y="3405261"/>
+                  </a:lnTo>
+                  <a:lnTo>
+                    <a:pt x="5801424" y="3399531"/>
+                  </a:lnTo>
+                  <a:lnTo>
+                    <a:pt x="5729802" y="3393383"/>
+                  </a:lnTo>
+                  <a:lnTo>
+                    <a:pt x="5658179" y="3386786"/>
+                  </a:lnTo>
+                  <a:lnTo>
+                    <a:pt x="5586557" y="3379707"/>
+                  </a:lnTo>
+                  <a:lnTo>
+                    <a:pt x="5514934" y="3372111"/>
+                  </a:lnTo>
+                  <a:lnTo>
+                    <a:pt x="5443311" y="3363961"/>
+                  </a:lnTo>
+                  <a:lnTo>
+                    <a:pt x="5371689" y="3355216"/>
+                  </a:lnTo>
+                  <a:lnTo>
+                    <a:pt x="5300066" y="3345832"/>
+                  </a:lnTo>
+                  <a:lnTo>
+                    <a:pt x="5228444" y="3335763"/>
+                  </a:lnTo>
+                  <a:lnTo>
+                    <a:pt x="5156821" y="3324959"/>
+                  </a:lnTo>
+                  <a:lnTo>
+                    <a:pt x="5085199" y="3313366"/>
+                  </a:lnTo>
+                  <a:lnTo>
+                    <a:pt x="5013576" y="3300927"/>
+                  </a:lnTo>
+                  <a:lnTo>
+                    <a:pt x="4941954" y="3287580"/>
+                  </a:lnTo>
+                  <a:lnTo>
+                    <a:pt x="4870331" y="3273258"/>
+                  </a:lnTo>
+                  <a:lnTo>
+                    <a:pt x="4798709" y="3257891"/>
+                  </a:lnTo>
+                  <a:lnTo>
+                    <a:pt x="4727086" y="3241402"/>
+                  </a:lnTo>
+                  <a:lnTo>
+                    <a:pt x="4655464" y="3223709"/>
+                  </a:lnTo>
+                  <a:lnTo>
+                    <a:pt x="4583841" y="3204724"/>
+                  </a:lnTo>
+                  <a:lnTo>
+                    <a:pt x="4512219" y="3184353"/>
+                  </a:lnTo>
+                  <a:lnTo>
+                    <a:pt x="4440596" y="3162495"/>
+                  </a:lnTo>
+                  <a:lnTo>
+                    <a:pt x="4368974" y="3139041"/>
+                  </a:lnTo>
+                  <a:lnTo>
+                    <a:pt x="4297351" y="3113875"/>
+                  </a:lnTo>
+                  <a:lnTo>
+                    <a:pt x="4225729" y="3086871"/>
+                  </a:lnTo>
+                  <a:lnTo>
+                    <a:pt x="4154106" y="3057896"/>
+                  </a:lnTo>
+                  <a:lnTo>
+                    <a:pt x="4082483" y="3026806"/>
+                  </a:lnTo>
+                  <a:lnTo>
+                    <a:pt x="4010861" y="2993446"/>
+                  </a:lnTo>
+                  <a:lnTo>
+                    <a:pt x="3939238" y="2957650"/>
+                  </a:lnTo>
+                  <a:lnTo>
+                    <a:pt x="3867616" y="2919240"/>
+                  </a:lnTo>
+                  <a:lnTo>
+                    <a:pt x="3795993" y="2878027"/>
+                  </a:lnTo>
+                  <a:lnTo>
+                    <a:pt x="3724371" y="2833805"/>
+                  </a:lnTo>
+                  <a:lnTo>
+                    <a:pt x="3652748" y="2786354"/>
+                  </a:lnTo>
+                  <a:lnTo>
+                    <a:pt x="3581126" y="2735439"/>
+                  </a:lnTo>
+                  <a:lnTo>
+                    <a:pt x="3509503" y="2680806"/>
+                  </a:lnTo>
+                  <a:lnTo>
+                    <a:pt x="3437881" y="2656459"/>
+                  </a:lnTo>
+                  <a:lnTo>
+                    <a:pt x="3366258" y="2660482"/>
+                  </a:lnTo>
+                  <a:lnTo>
+                    <a:pt x="3294636" y="2664485"/>
+                  </a:lnTo>
+                  <a:lnTo>
+                    <a:pt x="3223013" y="2668469"/>
+                  </a:lnTo>
+                  <a:lnTo>
+                    <a:pt x="3151391" y="2672434"/>
+                  </a:lnTo>
+                  <a:lnTo>
+                    <a:pt x="3079768" y="2676380"/>
+                  </a:lnTo>
+                  <a:lnTo>
+                    <a:pt x="3008146" y="2680306"/>
+                  </a:lnTo>
+                  <a:lnTo>
+                    <a:pt x="2936523" y="2684213"/>
+                  </a:lnTo>
+                  <a:lnTo>
+                    <a:pt x="2864901" y="2688101"/>
+                  </a:lnTo>
+                  <a:lnTo>
+                    <a:pt x="2793278" y="2691970"/>
+                  </a:lnTo>
+                  <a:lnTo>
+                    <a:pt x="2721655" y="2695821"/>
+                  </a:lnTo>
+                  <a:lnTo>
+                    <a:pt x="2650033" y="2699652"/>
+                  </a:lnTo>
+                  <a:lnTo>
+                    <a:pt x="2578410" y="2703465"/>
+                  </a:lnTo>
+                  <a:lnTo>
+                    <a:pt x="2506788" y="2707260"/>
+                  </a:lnTo>
+                  <a:lnTo>
+                    <a:pt x="2435165" y="2711036"/>
+                  </a:lnTo>
+                  <a:lnTo>
+                    <a:pt x="2363543" y="2714794"/>
+                  </a:lnTo>
+                  <a:lnTo>
+                    <a:pt x="2291920" y="2718533"/>
+                  </a:lnTo>
+                  <a:lnTo>
+                    <a:pt x="2220298" y="2722254"/>
+                  </a:lnTo>
+                  <a:lnTo>
+                    <a:pt x="2148675" y="2725958"/>
+                  </a:lnTo>
+                  <a:lnTo>
+                    <a:pt x="2077053" y="2729643"/>
+                  </a:lnTo>
+                  <a:lnTo>
+                    <a:pt x="2005430" y="2733310"/>
+                  </a:lnTo>
+                  <a:lnTo>
+                    <a:pt x="1933808" y="2736959"/>
+                  </a:lnTo>
+                  <a:lnTo>
+                    <a:pt x="1862185" y="2740591"/>
+                  </a:lnTo>
+                  <a:lnTo>
+                    <a:pt x="1790563" y="2744205"/>
+                  </a:lnTo>
+                  <a:lnTo>
+                    <a:pt x="1718940" y="2747801"/>
+                  </a:lnTo>
+                  <a:lnTo>
+                    <a:pt x="1647318" y="2751380"/>
+                  </a:lnTo>
+                  <a:lnTo>
+                    <a:pt x="1575695" y="2754942"/>
+                  </a:lnTo>
+                  <a:lnTo>
+                    <a:pt x="1504073" y="2758486"/>
+                  </a:lnTo>
+                  <a:lnTo>
+                    <a:pt x="1432450" y="2762013"/>
+                  </a:lnTo>
+                  <a:lnTo>
+                    <a:pt x="1360827" y="2765523"/>
+                  </a:lnTo>
+                  <a:lnTo>
+                    <a:pt x="1289205" y="2769015"/>
+                  </a:lnTo>
+                  <a:lnTo>
+                    <a:pt x="1217582" y="2772491"/>
+                  </a:lnTo>
+                  <a:lnTo>
+                    <a:pt x="1145960" y="2775950"/>
+                  </a:lnTo>
+                  <a:lnTo>
+                    <a:pt x="1074337" y="2779392"/>
+                  </a:lnTo>
+                  <a:lnTo>
+                    <a:pt x="1002715" y="2782817"/>
+                  </a:lnTo>
+                  <a:lnTo>
+                    <a:pt x="931092" y="2786226"/>
+                  </a:lnTo>
+                  <a:lnTo>
+                    <a:pt x="859470" y="2789618"/>
+                  </a:lnTo>
+                  <a:lnTo>
+                    <a:pt x="787847" y="2792993"/>
+                  </a:lnTo>
+                  <a:lnTo>
+                    <a:pt x="716225" y="2796353"/>
+                  </a:lnTo>
+                  <a:lnTo>
+                    <a:pt x="644602" y="2799695"/>
+                  </a:lnTo>
+                  <a:lnTo>
+                    <a:pt x="572980" y="2803022"/>
+                  </a:lnTo>
+                  <a:lnTo>
+                    <a:pt x="501357" y="2806332"/>
+                  </a:lnTo>
+                  <a:lnTo>
+                    <a:pt x="429735" y="2809627"/>
+                  </a:lnTo>
+                  <a:lnTo>
+                    <a:pt x="358112" y="2812905"/>
+                  </a:lnTo>
+                  <a:lnTo>
+                    <a:pt x="286490" y="2816167"/>
+                  </a:lnTo>
+                  <a:lnTo>
+                    <a:pt x="214867" y="2819414"/>
+                  </a:lnTo>
+                  <a:lnTo>
+                    <a:pt x="143245" y="2822644"/>
+                  </a:lnTo>
+                  <a:lnTo>
+                    <a:pt x="71622" y="2825859"/>
+                  </a:lnTo>
+                  <a:lnTo>
+                    <a:pt x="0" y="2829059"/>
                   </a:lnTo>
                   <a:close/>
                 </a:path>
@@ -3939,231 +3936,228 @@
           </p:nvSpPr>
           <p:spPr>
             <a:xfrm>
-              <a:off x="3171770" y="2073503"/>
-              <a:ext cx="5090908" cy="2651530"/>
+              <a:off x="3190243" y="2073503"/>
+              <a:ext cx="5072435" cy="2652416"/>
             </a:xfrm>
             <a:custGeom>
               <a:avLst/>
               <a:pathLst>
-                <a:path w="5090908" h="2651530">
+                <a:path w="5072435" h="2652416">
                   <a:moveTo>
                     <a:pt x="0" y="0"/>
                   </a:moveTo>
                   <a:lnTo>
-                    <a:pt x="5709" y="20120"/>
-                  </a:lnTo>
-                  <a:lnTo>
-                    <a:pt x="77331" y="255388"/>
-                  </a:lnTo>
-                  <a:lnTo>
-                    <a:pt x="148954" y="474674"/>
-                  </a:lnTo>
-                  <a:lnTo>
-                    <a:pt x="220576" y="679066"/>
-                  </a:lnTo>
-                  <a:lnTo>
-                    <a:pt x="292199" y="869574"/>
-                  </a:lnTo>
-                  <a:lnTo>
-                    <a:pt x="363822" y="1047142"/>
-                  </a:lnTo>
-                  <a:lnTo>
-                    <a:pt x="435444" y="1212649"/>
-                  </a:lnTo>
-                  <a:lnTo>
-                    <a:pt x="507067" y="1366913"/>
-                  </a:lnTo>
-                  <a:lnTo>
-                    <a:pt x="578689" y="1510699"/>
-                  </a:lnTo>
-                  <a:lnTo>
-                    <a:pt x="650312" y="1644719"/>
-                  </a:lnTo>
-                  <a:lnTo>
-                    <a:pt x="721934" y="1769635"/>
-                  </a:lnTo>
-                  <a:lnTo>
-                    <a:pt x="793557" y="1886066"/>
-                  </a:lnTo>
-                  <a:lnTo>
-                    <a:pt x="865179" y="1994589"/>
-                  </a:lnTo>
-                  <a:lnTo>
-                    <a:pt x="936802" y="2095740"/>
-                  </a:lnTo>
-                  <a:lnTo>
-                    <a:pt x="1008424" y="2190020"/>
-                  </a:lnTo>
-                  <a:lnTo>
-                    <a:pt x="1080047" y="2277897"/>
-                  </a:lnTo>
-                  <a:lnTo>
-                    <a:pt x="1151669" y="2359804"/>
-                  </a:lnTo>
-                  <a:lnTo>
-                    <a:pt x="1223292" y="2436148"/>
-                  </a:lnTo>
-                  <a:lnTo>
-                    <a:pt x="1294914" y="2507306"/>
-                  </a:lnTo>
-                  <a:lnTo>
-                    <a:pt x="1366537" y="2573631"/>
-                  </a:lnTo>
-                  <a:lnTo>
-                    <a:pt x="1438159" y="2635451"/>
-                  </a:lnTo>
-                  <a:lnTo>
-                    <a:pt x="1509782" y="2651530"/>
-                  </a:lnTo>
-                  <a:lnTo>
-                    <a:pt x="1581404" y="2647470"/>
-                  </a:lnTo>
-                  <a:lnTo>
-                    <a:pt x="1653027" y="2643391"/>
-                  </a:lnTo>
-                  <a:lnTo>
-                    <a:pt x="1724649" y="2639291"/>
-                  </a:lnTo>
-                  <a:lnTo>
-                    <a:pt x="1796272" y="2635172"/>
-                  </a:lnTo>
-                  <a:lnTo>
-                    <a:pt x="1867895" y="2631033"/>
-                  </a:lnTo>
-                  <a:lnTo>
-                    <a:pt x="1939517" y="2626873"/>
-                  </a:lnTo>
-                  <a:lnTo>
-                    <a:pt x="2011140" y="2622693"/>
-                  </a:lnTo>
-                  <a:lnTo>
-                    <a:pt x="2082762" y="2618492"/>
-                  </a:lnTo>
-                  <a:lnTo>
-                    <a:pt x="2154385" y="2614272"/>
-                  </a:lnTo>
-                  <a:lnTo>
-                    <a:pt x="2226007" y="2610030"/>
-                  </a:lnTo>
-                  <a:lnTo>
-                    <a:pt x="2297630" y="2605768"/>
-                  </a:lnTo>
-                  <a:lnTo>
-                    <a:pt x="2369252" y="2601485"/>
-                  </a:lnTo>
-                  <a:lnTo>
-                    <a:pt x="2440875" y="2597181"/>
-                  </a:lnTo>
-                  <a:lnTo>
-                    <a:pt x="2512497" y="2592856"/>
-                  </a:lnTo>
-                  <a:lnTo>
-                    <a:pt x="2584120" y="2588510"/>
-                  </a:lnTo>
-                  <a:lnTo>
-                    <a:pt x="2655742" y="2584143"/>
-                  </a:lnTo>
-                  <a:lnTo>
-                    <a:pt x="2727365" y="2579755"/>
-                  </a:lnTo>
-                  <a:lnTo>
-                    <a:pt x="2798987" y="2575345"/>
-                  </a:lnTo>
-                  <a:lnTo>
-                    <a:pt x="2870610" y="2570914"/>
-                  </a:lnTo>
-                  <a:lnTo>
-                    <a:pt x="2942232" y="2566461"/>
-                  </a:lnTo>
-                  <a:lnTo>
-                    <a:pt x="3013855" y="2561986"/>
-                  </a:lnTo>
-                  <a:lnTo>
-                    <a:pt x="3085477" y="2557489"/>
-                  </a:lnTo>
-                  <a:lnTo>
-                    <a:pt x="3157100" y="2552971"/>
-                  </a:lnTo>
-                  <a:lnTo>
-                    <a:pt x="3228723" y="2548431"/>
-                  </a:lnTo>
-                  <a:lnTo>
-                    <a:pt x="3300345" y="2543868"/>
-                  </a:lnTo>
-                  <a:lnTo>
-                    <a:pt x="3371968" y="2539283"/>
-                  </a:lnTo>
-                  <a:lnTo>
-                    <a:pt x="3443590" y="2534676"/>
-                  </a:lnTo>
-                  <a:lnTo>
-                    <a:pt x="3515213" y="2530046"/>
-                  </a:lnTo>
-                  <a:lnTo>
-                    <a:pt x="3586835" y="2525394"/>
-                  </a:lnTo>
-                  <a:lnTo>
-                    <a:pt x="3658458" y="2520719"/>
-                  </a:lnTo>
-                  <a:lnTo>
-                    <a:pt x="3730080" y="2516021"/>
-                  </a:lnTo>
-                  <a:lnTo>
-                    <a:pt x="3801703" y="2511300"/>
-                  </a:lnTo>
-                  <a:lnTo>
-                    <a:pt x="3873325" y="2506556"/>
-                  </a:lnTo>
-                  <a:lnTo>
-                    <a:pt x="3944948" y="2501789"/>
-                  </a:lnTo>
-                  <a:lnTo>
-                    <a:pt x="4016570" y="2496999"/>
-                  </a:lnTo>
-                  <a:lnTo>
-                    <a:pt x="4088193" y="2492186"/>
-                  </a:lnTo>
-                  <a:lnTo>
-                    <a:pt x="4159815" y="2487349"/>
-                  </a:lnTo>
-                  <a:lnTo>
-                    <a:pt x="4231438" y="2482488"/>
-                  </a:lnTo>
-                  <a:lnTo>
-                    <a:pt x="4303060" y="2477604"/>
-                  </a:lnTo>
-                  <a:lnTo>
-                    <a:pt x="4374683" y="2472695"/>
-                  </a:lnTo>
-                  <a:lnTo>
-                    <a:pt x="4446305" y="2467763"/>
-                  </a:lnTo>
-                  <a:lnTo>
-                    <a:pt x="4517928" y="2462807"/>
-                  </a:lnTo>
-                  <a:lnTo>
-                    <a:pt x="4589551" y="2457827"/>
-                  </a:lnTo>
-                  <a:lnTo>
-                    <a:pt x="4661173" y="2452822"/>
-                  </a:lnTo>
-                  <a:lnTo>
-                    <a:pt x="4732796" y="2447793"/>
-                  </a:lnTo>
-                  <a:lnTo>
-                    <a:pt x="4804418" y="2442740"/>
-                  </a:lnTo>
-                  <a:lnTo>
-                    <a:pt x="4876041" y="2437661"/>
-                  </a:lnTo>
-                  <a:lnTo>
-                    <a:pt x="4947663" y="2432558"/>
-                  </a:lnTo>
-                  <a:lnTo>
-                    <a:pt x="5019286" y="2427430"/>
-                  </a:lnTo>
-                  <a:lnTo>
-                    <a:pt x="5090908" y="2422278"/>
+                    <a:pt x="58858" y="197184"/>
+                  </a:lnTo>
+                  <a:lnTo>
+                    <a:pt x="130481" y="420803"/>
+                  </a:lnTo>
+                  <a:lnTo>
+                    <a:pt x="202103" y="629207"/>
+                  </a:lnTo>
+                  <a:lnTo>
+                    <a:pt x="273726" y="823431"/>
+                  </a:lnTo>
+                  <a:lnTo>
+                    <a:pt x="345348" y="1004440"/>
+                  </a:lnTo>
+                  <a:lnTo>
+                    <a:pt x="416971" y="1173134"/>
+                  </a:lnTo>
+                  <a:lnTo>
+                    <a:pt x="488593" y="1330349"/>
+                  </a:lnTo>
+                  <a:lnTo>
+                    <a:pt x="560216" y="1476867"/>
+                  </a:lnTo>
+                  <a:lnTo>
+                    <a:pt x="631838" y="1613416"/>
+                  </a:lnTo>
+                  <a:lnTo>
+                    <a:pt x="703461" y="1740674"/>
+                  </a:lnTo>
+                  <a:lnTo>
+                    <a:pt x="775084" y="1859273"/>
+                  </a:lnTo>
+                  <a:lnTo>
+                    <a:pt x="846706" y="1969803"/>
+                  </a:lnTo>
+                  <a:lnTo>
+                    <a:pt x="918329" y="2072813"/>
+                  </a:lnTo>
+                  <a:lnTo>
+                    <a:pt x="989951" y="2168813"/>
+                  </a:lnTo>
+                  <a:lnTo>
+                    <a:pt x="1061574" y="2258282"/>
+                  </a:lnTo>
+                  <a:lnTo>
+                    <a:pt x="1133196" y="2341663"/>
+                  </a:lnTo>
+                  <a:lnTo>
+                    <a:pt x="1204819" y="2419371"/>
+                  </a:lnTo>
+                  <a:lnTo>
+                    <a:pt x="1276441" y="2491791"/>
+                  </a:lnTo>
+                  <a:lnTo>
+                    <a:pt x="1348064" y="2559284"/>
+                  </a:lnTo>
+                  <a:lnTo>
+                    <a:pt x="1419686" y="2622185"/>
+                  </a:lnTo>
+                  <a:lnTo>
+                    <a:pt x="1491309" y="2652416"/>
+                  </a:lnTo>
+                  <a:lnTo>
+                    <a:pt x="1562931" y="2648353"/>
+                  </a:lnTo>
+                  <a:lnTo>
+                    <a:pt x="1634554" y="2644271"/>
+                  </a:lnTo>
+                  <a:lnTo>
+                    <a:pt x="1706176" y="2640169"/>
+                  </a:lnTo>
+                  <a:lnTo>
+                    <a:pt x="1777799" y="2636046"/>
+                  </a:lnTo>
+                  <a:lnTo>
+                    <a:pt x="1849421" y="2631904"/>
+                  </a:lnTo>
+                  <a:lnTo>
+                    <a:pt x="1921044" y="2627741"/>
+                  </a:lnTo>
+                  <a:lnTo>
+                    <a:pt x="1992666" y="2623558"/>
+                  </a:lnTo>
+                  <a:lnTo>
+                    <a:pt x="2064289" y="2619354"/>
+                  </a:lnTo>
+                  <a:lnTo>
+                    <a:pt x="2135912" y="2615130"/>
+                  </a:lnTo>
+                  <a:lnTo>
+                    <a:pt x="2207534" y="2610886"/>
+                  </a:lnTo>
+                  <a:lnTo>
+                    <a:pt x="2279157" y="2606620"/>
+                  </a:lnTo>
+                  <a:lnTo>
+                    <a:pt x="2350779" y="2602334"/>
+                  </a:lnTo>
+                  <a:lnTo>
+                    <a:pt x="2422402" y="2598026"/>
+                  </a:lnTo>
+                  <a:lnTo>
+                    <a:pt x="2494024" y="2593698"/>
+                  </a:lnTo>
+                  <a:lnTo>
+                    <a:pt x="2565647" y="2589349"/>
+                  </a:lnTo>
+                  <a:lnTo>
+                    <a:pt x="2637269" y="2584978"/>
+                  </a:lnTo>
+                  <a:lnTo>
+                    <a:pt x="2708892" y="2580586"/>
+                  </a:lnTo>
+                  <a:lnTo>
+                    <a:pt x="2780514" y="2576172"/>
+                  </a:lnTo>
+                  <a:lnTo>
+                    <a:pt x="2852137" y="2571737"/>
+                  </a:lnTo>
+                  <a:lnTo>
+                    <a:pt x="2923759" y="2567280"/>
+                  </a:lnTo>
+                  <a:lnTo>
+                    <a:pt x="2995382" y="2562802"/>
+                  </a:lnTo>
+                  <a:lnTo>
+                    <a:pt x="3067004" y="2558301"/>
+                  </a:lnTo>
+                  <a:lnTo>
+                    <a:pt x="3138627" y="2553779"/>
+                  </a:lnTo>
+                  <a:lnTo>
+                    <a:pt x="3210249" y="2549234"/>
+                  </a:lnTo>
+                  <a:lnTo>
+                    <a:pt x="3281872" y="2544668"/>
+                  </a:lnTo>
+                  <a:lnTo>
+                    <a:pt x="3353494" y="2540079"/>
+                  </a:lnTo>
+                  <a:lnTo>
+                    <a:pt x="3425117" y="2535467"/>
+                  </a:lnTo>
+                  <a:lnTo>
+                    <a:pt x="3496740" y="2530833"/>
+                  </a:lnTo>
+                  <a:lnTo>
+                    <a:pt x="3568362" y="2526176"/>
+                  </a:lnTo>
+                  <a:lnTo>
+                    <a:pt x="3639985" y="2521497"/>
+                  </a:lnTo>
+                  <a:lnTo>
+                    <a:pt x="3711607" y="2516795"/>
+                  </a:lnTo>
+                  <a:lnTo>
+                    <a:pt x="3783230" y="2512069"/>
+                  </a:lnTo>
+                  <a:lnTo>
+                    <a:pt x="3854852" y="2507321"/>
+                  </a:lnTo>
+                  <a:lnTo>
+                    <a:pt x="3926475" y="2502549"/>
+                  </a:lnTo>
+                  <a:lnTo>
+                    <a:pt x="3998097" y="2497755"/>
+                  </a:lnTo>
+                  <a:lnTo>
+                    <a:pt x="4069720" y="2492936"/>
+                  </a:lnTo>
+                  <a:lnTo>
+                    <a:pt x="4141342" y="2488094"/>
+                  </a:lnTo>
+                  <a:lnTo>
+                    <a:pt x="4212965" y="2483229"/>
+                  </a:lnTo>
+                  <a:lnTo>
+                    <a:pt x="4284587" y="2478340"/>
+                  </a:lnTo>
+                  <a:lnTo>
+                    <a:pt x="4356210" y="2473426"/>
+                  </a:lnTo>
+                  <a:lnTo>
+                    <a:pt x="4427832" y="2468489"/>
+                  </a:lnTo>
+                  <a:lnTo>
+                    <a:pt x="4499455" y="2463528"/>
+                  </a:lnTo>
+                  <a:lnTo>
+                    <a:pt x="4571077" y="2458542"/>
+                  </a:lnTo>
+                  <a:lnTo>
+                    <a:pt x="4642700" y="2453532"/>
+                  </a:lnTo>
+                  <a:lnTo>
+                    <a:pt x="4714322" y="2448498"/>
+                  </a:lnTo>
+                  <a:lnTo>
+                    <a:pt x="4785945" y="2443439"/>
+                  </a:lnTo>
+                  <a:lnTo>
+                    <a:pt x="4857568" y="2438355"/>
+                  </a:lnTo>
+                  <a:lnTo>
+                    <a:pt x="4929190" y="2433246"/>
+                  </a:lnTo>
+                  <a:lnTo>
+                    <a:pt x="5000813" y="2428113"/>
+                  </a:lnTo>
+                  <a:lnTo>
+                    <a:pt x="5072435" y="2422954"/>
                   </a:lnTo>
                 </a:path>
               </a:pathLst>
@@ -4183,312 +4177,312 @@
           </p:nvSpPr>
           <p:spPr>
             <a:xfrm>
-              <a:off x="1172049" y="4729073"/>
-              <a:ext cx="7090630" cy="804704"/>
+              <a:off x="1172049" y="4729962"/>
+              <a:ext cx="7090630" cy="803599"/>
             </a:xfrm>
             <a:custGeom>
               <a:avLst/>
               <a:pathLst>
-                <a:path w="7090630" h="804704">
+                <a:path w="7090630" h="803599">
                   <a:moveTo>
-                    <a:pt x="7090630" y="804704"/>
+                    <a:pt x="7090630" y="803599"/>
                   </a:moveTo>
                   <a:lnTo>
-                    <a:pt x="7019007" y="802994"/>
-                  </a:lnTo>
-                  <a:lnTo>
-                    <a:pt x="6947385" y="801159"/>
-                  </a:lnTo>
-                  <a:lnTo>
-                    <a:pt x="6875762" y="799190"/>
-                  </a:lnTo>
-                  <a:lnTo>
-                    <a:pt x="6804139" y="797078"/>
-                  </a:lnTo>
-                  <a:lnTo>
-                    <a:pt x="6732517" y="794811"/>
-                  </a:lnTo>
-                  <a:lnTo>
-                    <a:pt x="6660894" y="792380"/>
-                  </a:lnTo>
-                  <a:lnTo>
-                    <a:pt x="6589272" y="789771"/>
-                  </a:lnTo>
-                  <a:lnTo>
-                    <a:pt x="6517649" y="786972"/>
-                  </a:lnTo>
-                  <a:lnTo>
-                    <a:pt x="6446027" y="783970"/>
-                  </a:lnTo>
-                  <a:lnTo>
-                    <a:pt x="6374404" y="780748"/>
-                  </a:lnTo>
-                  <a:lnTo>
-                    <a:pt x="6302782" y="777292"/>
-                  </a:lnTo>
-                  <a:lnTo>
-                    <a:pt x="6231159" y="773584"/>
-                  </a:lnTo>
-                  <a:lnTo>
-                    <a:pt x="6159537" y="769605"/>
-                  </a:lnTo>
-                  <a:lnTo>
-                    <a:pt x="6087914" y="765337"/>
-                  </a:lnTo>
-                  <a:lnTo>
-                    <a:pt x="6016292" y="760758"/>
-                  </a:lnTo>
-                  <a:lnTo>
-                    <a:pt x="5944669" y="755845"/>
-                  </a:lnTo>
-                  <a:lnTo>
-                    <a:pt x="5873047" y="750573"/>
-                  </a:lnTo>
-                  <a:lnTo>
-                    <a:pt x="5801424" y="744918"/>
-                  </a:lnTo>
-                  <a:lnTo>
-                    <a:pt x="5729802" y="738851"/>
-                  </a:lnTo>
-                  <a:lnTo>
-                    <a:pt x="5658179" y="732341"/>
-                  </a:lnTo>
-                  <a:lnTo>
-                    <a:pt x="5586557" y="725357"/>
-                  </a:lnTo>
-                  <a:lnTo>
-                    <a:pt x="5514934" y="717864"/>
-                  </a:lnTo>
-                  <a:lnTo>
-                    <a:pt x="5443311" y="709825"/>
-                  </a:lnTo>
-                  <a:lnTo>
-                    <a:pt x="5371689" y="701201"/>
-                  </a:lnTo>
-                  <a:lnTo>
-                    <a:pt x="5300066" y="691947"/>
-                  </a:lnTo>
-                  <a:lnTo>
-                    <a:pt x="5228444" y="682020"/>
-                  </a:lnTo>
-                  <a:lnTo>
-                    <a:pt x="5156821" y="671368"/>
-                  </a:lnTo>
-                  <a:lnTo>
-                    <a:pt x="5085199" y="659941"/>
-                  </a:lnTo>
-                  <a:lnTo>
-                    <a:pt x="5013576" y="647681"/>
-                  </a:lnTo>
-                  <a:lnTo>
-                    <a:pt x="4941954" y="634527"/>
-                  </a:lnTo>
-                  <a:lnTo>
-                    <a:pt x="4870331" y="620415"/>
-                  </a:lnTo>
-                  <a:lnTo>
-                    <a:pt x="4798709" y="605274"/>
-                  </a:lnTo>
-                  <a:lnTo>
-                    <a:pt x="4727086" y="589031"/>
-                  </a:lnTo>
-                  <a:lnTo>
-                    <a:pt x="4655464" y="571603"/>
-                  </a:lnTo>
-                  <a:lnTo>
-                    <a:pt x="4583841" y="552905"/>
-                  </a:lnTo>
-                  <a:lnTo>
-                    <a:pt x="4512219" y="532845"/>
-                  </a:lnTo>
-                  <a:lnTo>
-                    <a:pt x="4440596" y="511322"/>
-                  </a:lnTo>
-                  <a:lnTo>
-                    <a:pt x="4368974" y="488231"/>
-                  </a:lnTo>
-                  <a:lnTo>
-                    <a:pt x="4297351" y="463458"/>
-                  </a:lnTo>
-                  <a:lnTo>
-                    <a:pt x="4225729" y="436879"/>
-                  </a:lnTo>
-                  <a:lnTo>
-                    <a:pt x="4154106" y="408363"/>
-                  </a:lnTo>
-                  <a:lnTo>
-                    <a:pt x="4082483" y="377769"/>
-                  </a:lnTo>
-                  <a:lnTo>
-                    <a:pt x="4010861" y="344946"/>
-                  </a:lnTo>
-                  <a:lnTo>
-                    <a:pt x="3939238" y="309731"/>
-                  </a:lnTo>
-                  <a:lnTo>
-                    <a:pt x="3867616" y="271949"/>
-                  </a:lnTo>
-                  <a:lnTo>
-                    <a:pt x="3795993" y="231414"/>
-                  </a:lnTo>
-                  <a:lnTo>
-                    <a:pt x="3724371" y="187925"/>
-                  </a:lnTo>
-                  <a:lnTo>
-                    <a:pt x="3652748" y="141266"/>
-                  </a:lnTo>
-                  <a:lnTo>
-                    <a:pt x="3581126" y="91207"/>
-                  </a:lnTo>
-                  <a:lnTo>
-                    <a:pt x="3509503" y="37501"/>
+                    <a:pt x="7019007" y="801869"/>
+                  </a:lnTo>
+                  <a:lnTo>
+                    <a:pt x="6947385" y="800014"/>
+                  </a:lnTo>
+                  <a:lnTo>
+                    <a:pt x="6875762" y="798022"/>
+                  </a:lnTo>
+                  <a:lnTo>
+                    <a:pt x="6804139" y="795886"/>
+                  </a:lnTo>
+                  <a:lnTo>
+                    <a:pt x="6732517" y="793593"/>
+                  </a:lnTo>
+                  <a:lnTo>
+                    <a:pt x="6660894" y="791133"/>
+                  </a:lnTo>
+                  <a:lnTo>
+                    <a:pt x="6589272" y="788494"/>
+                  </a:lnTo>
+                  <a:lnTo>
+                    <a:pt x="6517649" y="785662"/>
+                  </a:lnTo>
+                  <a:lnTo>
+                    <a:pt x="6446027" y="782623"/>
+                  </a:lnTo>
+                  <a:lnTo>
+                    <a:pt x="6374404" y="779362"/>
+                  </a:lnTo>
+                  <a:lnTo>
+                    <a:pt x="6302782" y="775863"/>
+                  </a:lnTo>
+                  <a:lnTo>
+                    <a:pt x="6231159" y="772109"/>
+                  </a:lnTo>
+                  <a:lnTo>
+                    <a:pt x="6159537" y="768080"/>
+                  </a:lnTo>
+                  <a:lnTo>
+                    <a:pt x="6087914" y="763757"/>
+                  </a:lnTo>
+                  <a:lnTo>
+                    <a:pt x="6016292" y="759119"/>
+                  </a:lnTo>
+                  <a:lnTo>
+                    <a:pt x="5944669" y="754142"/>
+                  </a:lnTo>
+                  <a:lnTo>
+                    <a:pt x="5873047" y="748802"/>
+                  </a:lnTo>
+                  <a:lnTo>
+                    <a:pt x="5801424" y="743072"/>
+                  </a:lnTo>
+                  <a:lnTo>
+                    <a:pt x="5729802" y="736924"/>
+                  </a:lnTo>
+                  <a:lnTo>
+                    <a:pt x="5658179" y="730327"/>
+                  </a:lnTo>
+                  <a:lnTo>
+                    <a:pt x="5586557" y="723248"/>
+                  </a:lnTo>
+                  <a:lnTo>
+                    <a:pt x="5514934" y="715652"/>
+                  </a:lnTo>
+                  <a:lnTo>
+                    <a:pt x="5443311" y="707502"/>
+                  </a:lnTo>
+                  <a:lnTo>
+                    <a:pt x="5371689" y="698757"/>
+                  </a:lnTo>
+                  <a:lnTo>
+                    <a:pt x="5300066" y="689373"/>
+                  </a:lnTo>
+                  <a:lnTo>
+                    <a:pt x="5228444" y="679304"/>
+                  </a:lnTo>
+                  <a:lnTo>
+                    <a:pt x="5156821" y="668500"/>
+                  </a:lnTo>
+                  <a:lnTo>
+                    <a:pt x="5085199" y="656907"/>
+                  </a:lnTo>
+                  <a:lnTo>
+                    <a:pt x="5013576" y="644468"/>
+                  </a:lnTo>
+                  <a:lnTo>
+                    <a:pt x="4941954" y="631121"/>
+                  </a:lnTo>
+                  <a:lnTo>
+                    <a:pt x="4870331" y="616799"/>
+                  </a:lnTo>
+                  <a:lnTo>
+                    <a:pt x="4798709" y="601432"/>
+                  </a:lnTo>
+                  <a:lnTo>
+                    <a:pt x="4727086" y="584943"/>
+                  </a:lnTo>
+                  <a:lnTo>
+                    <a:pt x="4655464" y="567250"/>
+                  </a:lnTo>
+                  <a:lnTo>
+                    <a:pt x="4583841" y="548265"/>
+                  </a:lnTo>
+                  <a:lnTo>
+                    <a:pt x="4512219" y="527894"/>
+                  </a:lnTo>
+                  <a:lnTo>
+                    <a:pt x="4440596" y="506036"/>
+                  </a:lnTo>
+                  <a:lnTo>
+                    <a:pt x="4368974" y="482582"/>
+                  </a:lnTo>
+                  <a:lnTo>
+                    <a:pt x="4297351" y="457416"/>
+                  </a:lnTo>
+                  <a:lnTo>
+                    <a:pt x="4225729" y="430412"/>
+                  </a:lnTo>
+                  <a:lnTo>
+                    <a:pt x="4154106" y="401437"/>
+                  </a:lnTo>
+                  <a:lnTo>
+                    <a:pt x="4082483" y="370347"/>
+                  </a:lnTo>
+                  <a:lnTo>
+                    <a:pt x="4010861" y="336986"/>
+                  </a:lnTo>
+                  <a:lnTo>
+                    <a:pt x="3939238" y="301190"/>
+                  </a:lnTo>
+                  <a:lnTo>
+                    <a:pt x="3867616" y="262781"/>
+                  </a:lnTo>
+                  <a:lnTo>
+                    <a:pt x="3795993" y="221568"/>
+                  </a:lnTo>
+                  <a:lnTo>
+                    <a:pt x="3724371" y="177346"/>
+                  </a:lnTo>
+                  <a:lnTo>
+                    <a:pt x="3652748" y="129895"/>
+                  </a:lnTo>
+                  <a:lnTo>
+                    <a:pt x="3581126" y="78979"/>
+                  </a:lnTo>
+                  <a:lnTo>
+                    <a:pt x="3509503" y="24347"/>
                   </a:lnTo>
                   <a:lnTo>
                     <a:pt x="3437881" y="0"/>
                   </a:lnTo>
                   <a:lnTo>
-                    <a:pt x="3366258" y="4020"/>
-                  </a:lnTo>
-                  <a:lnTo>
-                    <a:pt x="3294636" y="8021"/>
-                  </a:lnTo>
-                  <a:lnTo>
-                    <a:pt x="3223013" y="12002"/>
-                  </a:lnTo>
-                  <a:lnTo>
-                    <a:pt x="3151391" y="15964"/>
-                  </a:lnTo>
-                  <a:lnTo>
-                    <a:pt x="3079768" y="19907"/>
-                  </a:lnTo>
-                  <a:lnTo>
-                    <a:pt x="3008146" y="23831"/>
-                  </a:lnTo>
-                  <a:lnTo>
-                    <a:pt x="2936523" y="27736"/>
-                  </a:lnTo>
-                  <a:lnTo>
-                    <a:pt x="2864901" y="31621"/>
-                  </a:lnTo>
-                  <a:lnTo>
-                    <a:pt x="2793278" y="35488"/>
-                  </a:lnTo>
-                  <a:lnTo>
-                    <a:pt x="2721655" y="39336"/>
-                  </a:lnTo>
-                  <a:lnTo>
-                    <a:pt x="2650033" y="43166"/>
-                  </a:lnTo>
-                  <a:lnTo>
-                    <a:pt x="2578410" y="46977"/>
-                  </a:lnTo>
-                  <a:lnTo>
-                    <a:pt x="2506788" y="50769"/>
-                  </a:lnTo>
-                  <a:lnTo>
-                    <a:pt x="2435165" y="54543"/>
-                  </a:lnTo>
-                  <a:lnTo>
-                    <a:pt x="2363543" y="58299"/>
-                  </a:lnTo>
-                  <a:lnTo>
-                    <a:pt x="2291920" y="62036"/>
-                  </a:lnTo>
-                  <a:lnTo>
-                    <a:pt x="2220298" y="65755"/>
-                  </a:lnTo>
-                  <a:lnTo>
-                    <a:pt x="2148675" y="69456"/>
-                  </a:lnTo>
-                  <a:lnTo>
-                    <a:pt x="2077053" y="73140"/>
-                  </a:lnTo>
-                  <a:lnTo>
-                    <a:pt x="2005430" y="76805"/>
-                  </a:lnTo>
-                  <a:lnTo>
-                    <a:pt x="1933808" y="80452"/>
-                  </a:lnTo>
-                  <a:lnTo>
-                    <a:pt x="1862185" y="84082"/>
-                  </a:lnTo>
-                  <a:lnTo>
-                    <a:pt x="1790563" y="87694"/>
-                  </a:lnTo>
-                  <a:lnTo>
-                    <a:pt x="1718940" y="91289"/>
-                  </a:lnTo>
-                  <a:lnTo>
-                    <a:pt x="1647318" y="94866"/>
-                  </a:lnTo>
-                  <a:lnTo>
-                    <a:pt x="1575695" y="98426"/>
-                  </a:lnTo>
-                  <a:lnTo>
-                    <a:pt x="1504073" y="101969"/>
-                  </a:lnTo>
-                  <a:lnTo>
-                    <a:pt x="1432450" y="105494"/>
-                  </a:lnTo>
-                  <a:lnTo>
-                    <a:pt x="1360827" y="109002"/>
-                  </a:lnTo>
-                  <a:lnTo>
-                    <a:pt x="1289205" y="112494"/>
-                  </a:lnTo>
-                  <a:lnTo>
-                    <a:pt x="1217582" y="115968"/>
-                  </a:lnTo>
-                  <a:lnTo>
-                    <a:pt x="1145960" y="119425"/>
-                  </a:lnTo>
-                  <a:lnTo>
-                    <a:pt x="1074337" y="122866"/>
-                  </a:lnTo>
-                  <a:lnTo>
-                    <a:pt x="1002715" y="126290"/>
-                  </a:lnTo>
-                  <a:lnTo>
-                    <a:pt x="931092" y="129697"/>
-                  </a:lnTo>
-                  <a:lnTo>
-                    <a:pt x="859470" y="133088"/>
-                  </a:lnTo>
-                  <a:lnTo>
-                    <a:pt x="787847" y="136462"/>
-                  </a:lnTo>
-                  <a:lnTo>
-                    <a:pt x="716225" y="139820"/>
-                  </a:lnTo>
-                  <a:lnTo>
-                    <a:pt x="644602" y="143162"/>
-                  </a:lnTo>
-                  <a:lnTo>
-                    <a:pt x="572980" y="146487"/>
-                  </a:lnTo>
-                  <a:lnTo>
-                    <a:pt x="501357" y="149797"/>
-                  </a:lnTo>
-                  <a:lnTo>
-                    <a:pt x="429735" y="153090"/>
-                  </a:lnTo>
-                  <a:lnTo>
-                    <a:pt x="358112" y="156367"/>
-                  </a:lnTo>
-                  <a:lnTo>
-                    <a:pt x="286490" y="159628"/>
-                  </a:lnTo>
-                  <a:lnTo>
-                    <a:pt x="214867" y="162874"/>
-                  </a:lnTo>
-                  <a:lnTo>
-                    <a:pt x="143245" y="166103"/>
-                  </a:lnTo>
-                  <a:lnTo>
-                    <a:pt x="71622" y="169318"/>
-                  </a:lnTo>
-                  <a:lnTo>
-                    <a:pt x="0" y="172516"/>
+                    <a:pt x="3366258" y="4023"/>
+                  </a:lnTo>
+                  <a:lnTo>
+                    <a:pt x="3294636" y="8026"/>
+                  </a:lnTo>
+                  <a:lnTo>
+                    <a:pt x="3223013" y="12010"/>
+                  </a:lnTo>
+                  <a:lnTo>
+                    <a:pt x="3151391" y="15975"/>
+                  </a:lnTo>
+                  <a:lnTo>
+                    <a:pt x="3079768" y="19920"/>
+                  </a:lnTo>
+                  <a:lnTo>
+                    <a:pt x="3008146" y="23847"/>
+                  </a:lnTo>
+                  <a:lnTo>
+                    <a:pt x="2936523" y="27754"/>
+                  </a:lnTo>
+                  <a:lnTo>
+                    <a:pt x="2864901" y="31642"/>
+                  </a:lnTo>
+                  <a:lnTo>
+                    <a:pt x="2793278" y="35511"/>
+                  </a:lnTo>
+                  <a:lnTo>
+                    <a:pt x="2721655" y="39362"/>
+                  </a:lnTo>
+                  <a:lnTo>
+                    <a:pt x="2650033" y="43193"/>
+                  </a:lnTo>
+                  <a:lnTo>
+                    <a:pt x="2578410" y="47006"/>
+                  </a:lnTo>
+                  <a:lnTo>
+                    <a:pt x="2506788" y="50801"/>
+                  </a:lnTo>
+                  <a:lnTo>
+                    <a:pt x="2435165" y="54577"/>
+                  </a:lnTo>
+                  <a:lnTo>
+                    <a:pt x="2363543" y="58335"/>
+                  </a:lnTo>
+                  <a:lnTo>
+                    <a:pt x="2291920" y="62074"/>
+                  </a:lnTo>
+                  <a:lnTo>
+                    <a:pt x="2220298" y="65795"/>
+                  </a:lnTo>
+                  <a:lnTo>
+                    <a:pt x="2148675" y="69498"/>
+                  </a:lnTo>
+                  <a:lnTo>
+                    <a:pt x="2077053" y="73183"/>
+                  </a:lnTo>
+                  <a:lnTo>
+                    <a:pt x="2005430" y="76851"/>
+                  </a:lnTo>
+                  <a:lnTo>
+                    <a:pt x="1933808" y="80500"/>
+                  </a:lnTo>
+                  <a:lnTo>
+                    <a:pt x="1862185" y="84132"/>
+                  </a:lnTo>
+                  <a:lnTo>
+                    <a:pt x="1790563" y="87746"/>
+                  </a:lnTo>
+                  <a:lnTo>
+                    <a:pt x="1718940" y="91342"/>
+                  </a:lnTo>
+                  <a:lnTo>
+                    <a:pt x="1647318" y="94921"/>
+                  </a:lnTo>
+                  <a:lnTo>
+                    <a:pt x="1575695" y="98483"/>
+                  </a:lnTo>
+                  <a:lnTo>
+                    <a:pt x="1504073" y="102027"/>
+                  </a:lnTo>
+                  <a:lnTo>
+                    <a:pt x="1432450" y="105554"/>
+                  </a:lnTo>
+                  <a:lnTo>
+                    <a:pt x="1360827" y="109063"/>
+                  </a:lnTo>
+                  <a:lnTo>
+                    <a:pt x="1289205" y="112556"/>
+                  </a:lnTo>
+                  <a:lnTo>
+                    <a:pt x="1217582" y="116032"/>
+                  </a:lnTo>
+                  <a:lnTo>
+                    <a:pt x="1145960" y="119491"/>
+                  </a:lnTo>
+                  <a:lnTo>
+                    <a:pt x="1074337" y="122933"/>
+                  </a:lnTo>
+                  <a:lnTo>
+                    <a:pt x="1002715" y="126358"/>
+                  </a:lnTo>
+                  <a:lnTo>
+                    <a:pt x="931092" y="129767"/>
+                  </a:lnTo>
+                  <a:lnTo>
+                    <a:pt x="859470" y="133159"/>
+                  </a:lnTo>
+                  <a:lnTo>
+                    <a:pt x="787847" y="136534"/>
+                  </a:lnTo>
+                  <a:lnTo>
+                    <a:pt x="716225" y="139893"/>
+                  </a:lnTo>
+                  <a:lnTo>
+                    <a:pt x="644602" y="143236"/>
+                  </a:lnTo>
+                  <a:lnTo>
+                    <a:pt x="572980" y="146563"/>
+                  </a:lnTo>
+                  <a:lnTo>
+                    <a:pt x="501357" y="149873"/>
+                  </a:lnTo>
+                  <a:lnTo>
+                    <a:pt x="429735" y="153167"/>
+                  </a:lnTo>
+                  <a:lnTo>
+                    <a:pt x="358112" y="156446"/>
+                  </a:lnTo>
+                  <a:lnTo>
+                    <a:pt x="286490" y="159708"/>
+                  </a:lnTo>
+                  <a:lnTo>
+                    <a:pt x="214867" y="162954"/>
+                  </a:lnTo>
+                  <a:lnTo>
+                    <a:pt x="143245" y="166185"/>
+                  </a:lnTo>
+                  <a:lnTo>
+                    <a:pt x="71622" y="169400"/>
+                  </a:lnTo>
+                  <a:lnTo>
+                    <a:pt x="0" y="172599"/>
                   </a:lnTo>
                 </a:path>
               </a:pathLst>
@@ -4508,300 +4502,300 @@
           </p:nvSpPr>
           <p:spPr>
             <a:xfrm>
-              <a:off x="1493466" y="2073503"/>
-              <a:ext cx="6769212" cy="3325904"/>
+              <a:off x="1514620" y="2073503"/>
+              <a:ext cx="6748058" cy="3325227"/>
             </a:xfrm>
             <a:custGeom>
               <a:avLst/>
               <a:pathLst>
-                <a:path w="6769212" h="3325904">
+                <a:path w="6748058" h="3325227">
                   <a:moveTo>
                     <a:pt x="0" y="0"/>
                   </a:moveTo>
                   <a:lnTo>
-                    <a:pt x="36695" y="58404"/>
-                  </a:lnTo>
-                  <a:lnTo>
-                    <a:pt x="108317" y="168727"/>
-                  </a:lnTo>
-                  <a:lnTo>
-                    <a:pt x="179940" y="275496"/>
-                  </a:lnTo>
-                  <a:lnTo>
-                    <a:pt x="251563" y="378827"/>
-                  </a:lnTo>
-                  <a:lnTo>
-                    <a:pt x="323185" y="478829"/>
-                  </a:lnTo>
-                  <a:lnTo>
-                    <a:pt x="394808" y="575611"/>
-                  </a:lnTo>
-                  <a:lnTo>
-                    <a:pt x="466430" y="669276"/>
-                  </a:lnTo>
-                  <a:lnTo>
-                    <a:pt x="538053" y="759924"/>
-                  </a:lnTo>
-                  <a:lnTo>
-                    <a:pt x="609675" y="847652"/>
-                  </a:lnTo>
-                  <a:lnTo>
-                    <a:pt x="681298" y="932555"/>
-                  </a:lnTo>
-                  <a:lnTo>
-                    <a:pt x="752920" y="1014723"/>
-                  </a:lnTo>
-                  <a:lnTo>
-                    <a:pt x="824543" y="1094245"/>
-                  </a:lnTo>
-                  <a:lnTo>
-                    <a:pt x="896165" y="1171206"/>
-                  </a:lnTo>
-                  <a:lnTo>
-                    <a:pt x="967788" y="1245687"/>
-                  </a:lnTo>
-                  <a:lnTo>
-                    <a:pt x="1039410" y="1317770"/>
-                  </a:lnTo>
-                  <a:lnTo>
-                    <a:pt x="1111033" y="1387532"/>
-                  </a:lnTo>
-                  <a:lnTo>
-                    <a:pt x="1182655" y="1455046"/>
-                  </a:lnTo>
-                  <a:lnTo>
-                    <a:pt x="1254278" y="1520386"/>
-                  </a:lnTo>
-                  <a:lnTo>
-                    <a:pt x="1325900" y="1583622"/>
-                  </a:lnTo>
-                  <a:lnTo>
-                    <a:pt x="1397523" y="1644821"/>
-                  </a:lnTo>
-                  <a:lnTo>
-                    <a:pt x="1469145" y="1704048"/>
-                  </a:lnTo>
-                  <a:lnTo>
-                    <a:pt x="1540768" y="1761368"/>
-                  </a:lnTo>
-                  <a:lnTo>
-                    <a:pt x="1612391" y="1816843"/>
-                  </a:lnTo>
-                  <a:lnTo>
-                    <a:pt x="1684013" y="1870530"/>
-                  </a:lnTo>
-                  <a:lnTo>
-                    <a:pt x="1755636" y="1922488"/>
-                  </a:lnTo>
-                  <a:lnTo>
-                    <a:pt x="1827258" y="1972773"/>
-                  </a:lnTo>
-                  <a:lnTo>
-                    <a:pt x="1898881" y="2021438"/>
-                  </a:lnTo>
-                  <a:lnTo>
-                    <a:pt x="1970503" y="2068536"/>
-                  </a:lnTo>
-                  <a:lnTo>
-                    <a:pt x="2042126" y="2114116"/>
-                  </a:lnTo>
-                  <a:lnTo>
-                    <a:pt x="2113748" y="2158229"/>
-                  </a:lnTo>
-                  <a:lnTo>
-                    <a:pt x="2185371" y="2200921"/>
-                  </a:lnTo>
-                  <a:lnTo>
-                    <a:pt x="2256993" y="2242238"/>
-                  </a:lnTo>
-                  <a:lnTo>
-                    <a:pt x="2328616" y="2282224"/>
-                  </a:lnTo>
-                  <a:lnTo>
-                    <a:pt x="2400238" y="2320923"/>
-                  </a:lnTo>
-                  <a:lnTo>
-                    <a:pt x="2471861" y="2358375"/>
-                  </a:lnTo>
-                  <a:lnTo>
-                    <a:pt x="2543483" y="2394621"/>
-                  </a:lnTo>
-                  <a:lnTo>
-                    <a:pt x="2615106" y="2429699"/>
-                  </a:lnTo>
-                  <a:lnTo>
-                    <a:pt x="2686728" y="2463647"/>
-                  </a:lnTo>
-                  <a:lnTo>
-                    <a:pt x="2758351" y="2496503"/>
-                  </a:lnTo>
-                  <a:lnTo>
-                    <a:pt x="2829973" y="2528300"/>
-                  </a:lnTo>
-                  <a:lnTo>
-                    <a:pt x="2901596" y="2559072"/>
-                  </a:lnTo>
-                  <a:lnTo>
-                    <a:pt x="2973219" y="2588854"/>
-                  </a:lnTo>
-                  <a:lnTo>
-                    <a:pt x="3044841" y="2617677"/>
-                  </a:lnTo>
-                  <a:lnTo>
-                    <a:pt x="3116464" y="2645571"/>
-                  </a:lnTo>
-                  <a:lnTo>
-                    <a:pt x="3188086" y="2672567"/>
-                  </a:lnTo>
-                  <a:lnTo>
-                    <a:pt x="3259709" y="2698693"/>
-                  </a:lnTo>
-                  <a:lnTo>
-                    <a:pt x="3331331" y="2723978"/>
-                  </a:lnTo>
-                  <a:lnTo>
-                    <a:pt x="3402954" y="2748448"/>
-                  </a:lnTo>
-                  <a:lnTo>
-                    <a:pt x="3474576" y="2772131"/>
-                  </a:lnTo>
-                  <a:lnTo>
-                    <a:pt x="3546199" y="2795050"/>
-                  </a:lnTo>
-                  <a:lnTo>
-                    <a:pt x="3617821" y="2817232"/>
-                  </a:lnTo>
-                  <a:lnTo>
-                    <a:pt x="3689444" y="2838699"/>
-                  </a:lnTo>
-                  <a:lnTo>
-                    <a:pt x="3761066" y="2859474"/>
-                  </a:lnTo>
-                  <a:lnTo>
-                    <a:pt x="3832689" y="2879581"/>
-                  </a:lnTo>
-                  <a:lnTo>
-                    <a:pt x="3904311" y="2899039"/>
-                  </a:lnTo>
-                  <a:lnTo>
-                    <a:pt x="3975934" y="2917872"/>
-                  </a:lnTo>
-                  <a:lnTo>
-                    <a:pt x="4047556" y="2936097"/>
-                  </a:lnTo>
-                  <a:lnTo>
-                    <a:pt x="4119179" y="2953736"/>
-                  </a:lnTo>
-                  <a:lnTo>
-                    <a:pt x="4190801" y="2970806"/>
-                  </a:lnTo>
-                  <a:lnTo>
-                    <a:pt x="4262424" y="2987327"/>
-                  </a:lnTo>
-                  <a:lnTo>
-                    <a:pt x="4334047" y="3003315"/>
-                  </a:lnTo>
-                  <a:lnTo>
-                    <a:pt x="4405669" y="3018789"/>
-                  </a:lnTo>
-                  <a:lnTo>
-                    <a:pt x="4477292" y="3033764"/>
-                  </a:lnTo>
-                  <a:lnTo>
-                    <a:pt x="4548914" y="3048257"/>
-                  </a:lnTo>
-                  <a:lnTo>
-                    <a:pt x="4620537" y="3062283"/>
-                  </a:lnTo>
-                  <a:lnTo>
-                    <a:pt x="4692159" y="3075858"/>
-                  </a:lnTo>
-                  <a:lnTo>
-                    <a:pt x="4763782" y="3088995"/>
-                  </a:lnTo>
-                  <a:lnTo>
-                    <a:pt x="4835404" y="3101709"/>
-                  </a:lnTo>
-                  <a:lnTo>
-                    <a:pt x="4907027" y="3114014"/>
-                  </a:lnTo>
-                  <a:lnTo>
-                    <a:pt x="4978649" y="3125922"/>
-                  </a:lnTo>
-                  <a:lnTo>
-                    <a:pt x="5050272" y="3137447"/>
-                  </a:lnTo>
-                  <a:lnTo>
-                    <a:pt x="5121894" y="3148600"/>
-                  </a:lnTo>
-                  <a:lnTo>
-                    <a:pt x="5193517" y="3159395"/>
-                  </a:lnTo>
-                  <a:lnTo>
-                    <a:pt x="5265139" y="3169841"/>
-                  </a:lnTo>
-                  <a:lnTo>
-                    <a:pt x="5336762" y="3179951"/>
-                  </a:lnTo>
-                  <a:lnTo>
-                    <a:pt x="5408384" y="3189736"/>
-                  </a:lnTo>
-                  <a:lnTo>
-                    <a:pt x="5480007" y="3199205"/>
-                  </a:lnTo>
-                  <a:lnTo>
-                    <a:pt x="5551629" y="3208370"/>
-                  </a:lnTo>
-                  <a:lnTo>
-                    <a:pt x="5623252" y="3217239"/>
-                  </a:lnTo>
-                  <a:lnTo>
-                    <a:pt x="5694875" y="3225823"/>
-                  </a:lnTo>
-                  <a:lnTo>
-                    <a:pt x="5766497" y="3234130"/>
-                  </a:lnTo>
-                  <a:lnTo>
-                    <a:pt x="5838120" y="3242169"/>
-                  </a:lnTo>
-                  <a:lnTo>
-                    <a:pt x="5909742" y="3249950"/>
-                  </a:lnTo>
-                  <a:lnTo>
-                    <a:pt x="5981365" y="3257480"/>
-                  </a:lnTo>
-                  <a:lnTo>
-                    <a:pt x="6052987" y="3264768"/>
-                  </a:lnTo>
-                  <a:lnTo>
-                    <a:pt x="6124610" y="3271821"/>
-                  </a:lnTo>
-                  <a:lnTo>
-                    <a:pt x="6196232" y="3278646"/>
-                  </a:lnTo>
-                  <a:lnTo>
-                    <a:pt x="6267855" y="3285252"/>
-                  </a:lnTo>
-                  <a:lnTo>
-                    <a:pt x="6339477" y="3291645"/>
-                  </a:lnTo>
-                  <a:lnTo>
-                    <a:pt x="6411100" y="3297832"/>
-                  </a:lnTo>
-                  <a:lnTo>
-                    <a:pt x="6482722" y="3303820"/>
-                  </a:lnTo>
-                  <a:lnTo>
-                    <a:pt x="6554345" y="3309615"/>
-                  </a:lnTo>
-                  <a:lnTo>
-                    <a:pt x="6625967" y="3315224"/>
-                  </a:lnTo>
-                  <a:lnTo>
-                    <a:pt x="6697590" y="3320651"/>
-                  </a:lnTo>
-                  <a:lnTo>
-                    <a:pt x="6769212" y="3325904"/>
+                    <a:pt x="15541" y="25021"/>
+                  </a:lnTo>
+                  <a:lnTo>
+                    <a:pt x="87163" y="136612"/>
+                  </a:lnTo>
+                  <a:lnTo>
+                    <a:pt x="158786" y="244602"/>
+                  </a:lnTo>
+                  <a:lnTo>
+                    <a:pt x="230409" y="349108"/>
+                  </a:lnTo>
+                  <a:lnTo>
+                    <a:pt x="302031" y="450243"/>
+                  </a:lnTo>
+                  <a:lnTo>
+                    <a:pt x="373654" y="548115"/>
+                  </a:lnTo>
+                  <a:lnTo>
+                    <a:pt x="445276" y="642829"/>
+                  </a:lnTo>
+                  <a:lnTo>
+                    <a:pt x="516899" y="734487"/>
+                  </a:lnTo>
+                  <a:lnTo>
+                    <a:pt x="588521" y="823187"/>
+                  </a:lnTo>
+                  <a:lnTo>
+                    <a:pt x="660144" y="909027"/>
+                  </a:lnTo>
+                  <a:lnTo>
+                    <a:pt x="731766" y="992096"/>
+                  </a:lnTo>
+                  <a:lnTo>
+                    <a:pt x="803389" y="1072486"/>
+                  </a:lnTo>
+                  <a:lnTo>
+                    <a:pt x="875011" y="1150281"/>
+                  </a:lnTo>
+                  <a:lnTo>
+                    <a:pt x="946634" y="1225567"/>
+                  </a:lnTo>
+                  <a:lnTo>
+                    <a:pt x="1018256" y="1298424"/>
+                  </a:lnTo>
+                  <a:lnTo>
+                    <a:pt x="1089879" y="1368930"/>
+                  </a:lnTo>
+                  <a:lnTo>
+                    <a:pt x="1161501" y="1437162"/>
+                  </a:lnTo>
+                  <a:lnTo>
+                    <a:pt x="1233124" y="1503192"/>
+                  </a:lnTo>
+                  <a:lnTo>
+                    <a:pt x="1304746" y="1567092"/>
+                  </a:lnTo>
+                  <a:lnTo>
+                    <a:pt x="1376369" y="1628930"/>
+                  </a:lnTo>
+                  <a:lnTo>
+                    <a:pt x="1447991" y="1688773"/>
+                  </a:lnTo>
+                  <a:lnTo>
+                    <a:pt x="1519614" y="1746685"/>
+                  </a:lnTo>
+                  <a:lnTo>
+                    <a:pt x="1591237" y="1802729"/>
+                  </a:lnTo>
+                  <a:lnTo>
+                    <a:pt x="1662859" y="1856964"/>
+                  </a:lnTo>
+                  <a:lnTo>
+                    <a:pt x="1734482" y="1909450"/>
+                  </a:lnTo>
+                  <a:lnTo>
+                    <a:pt x="1806104" y="1960242"/>
+                  </a:lnTo>
+                  <a:lnTo>
+                    <a:pt x="1877727" y="2009396"/>
+                  </a:lnTo>
+                  <a:lnTo>
+                    <a:pt x="1949349" y="2056964"/>
+                  </a:lnTo>
+                  <a:lnTo>
+                    <a:pt x="2020972" y="2102997"/>
+                  </a:lnTo>
+                  <a:lnTo>
+                    <a:pt x="2092594" y="2147545"/>
+                  </a:lnTo>
+                  <a:lnTo>
+                    <a:pt x="2164217" y="2190655"/>
+                  </a:lnTo>
+                  <a:lnTo>
+                    <a:pt x="2235839" y="2232375"/>
+                  </a:lnTo>
+                  <a:lnTo>
+                    <a:pt x="2307462" y="2272749"/>
+                  </a:lnTo>
+                  <a:lnTo>
+                    <a:pt x="2379084" y="2311820"/>
+                  </a:lnTo>
+                  <a:lnTo>
+                    <a:pt x="2450707" y="2349630"/>
+                  </a:lnTo>
+                  <a:lnTo>
+                    <a:pt x="2522329" y="2386221"/>
+                  </a:lnTo>
+                  <a:lnTo>
+                    <a:pt x="2593952" y="2421631"/>
+                  </a:lnTo>
+                  <a:lnTo>
+                    <a:pt x="2665574" y="2455899"/>
+                  </a:lnTo>
+                  <a:lnTo>
+                    <a:pt x="2737197" y="2489061"/>
+                  </a:lnTo>
+                  <a:lnTo>
+                    <a:pt x="2808819" y="2521153"/>
+                  </a:lnTo>
+                  <a:lnTo>
+                    <a:pt x="2880442" y="2552209"/>
+                  </a:lnTo>
+                  <a:lnTo>
+                    <a:pt x="2952065" y="2582264"/>
+                  </a:lnTo>
+                  <a:lnTo>
+                    <a:pt x="3023687" y="2611349"/>
+                  </a:lnTo>
+                  <a:lnTo>
+                    <a:pt x="3095310" y="2639496"/>
+                  </a:lnTo>
+                  <a:lnTo>
+                    <a:pt x="3166932" y="2666734"/>
+                  </a:lnTo>
+                  <a:lnTo>
+                    <a:pt x="3238555" y="2693094"/>
+                  </a:lnTo>
+                  <a:lnTo>
+                    <a:pt x="3310177" y="2718603"/>
+                  </a:lnTo>
+                  <a:lnTo>
+                    <a:pt x="3381800" y="2743290"/>
+                  </a:lnTo>
+                  <a:lnTo>
+                    <a:pt x="3453422" y="2767179"/>
+                  </a:lnTo>
+                  <a:lnTo>
+                    <a:pt x="3525045" y="2790298"/>
+                  </a:lnTo>
+                  <a:lnTo>
+                    <a:pt x="3596667" y="2812671"/>
+                  </a:lnTo>
+                  <a:lnTo>
+                    <a:pt x="3668290" y="2834323"/>
+                  </a:lnTo>
+                  <a:lnTo>
+                    <a:pt x="3739912" y="2855275"/>
+                  </a:lnTo>
+                  <a:lnTo>
+                    <a:pt x="3811535" y="2875552"/>
+                  </a:lnTo>
+                  <a:lnTo>
+                    <a:pt x="3883157" y="2895175"/>
+                  </a:lnTo>
+                  <a:lnTo>
+                    <a:pt x="3954780" y="2914164"/>
+                  </a:lnTo>
+                  <a:lnTo>
+                    <a:pt x="4026402" y="2932541"/>
+                  </a:lnTo>
+                  <a:lnTo>
+                    <a:pt x="4098025" y="2950325"/>
+                  </a:lnTo>
+                  <a:lnTo>
+                    <a:pt x="4169647" y="2967535"/>
+                  </a:lnTo>
+                  <a:lnTo>
+                    <a:pt x="4241270" y="2984189"/>
+                  </a:lnTo>
+                  <a:lnTo>
+                    <a:pt x="4312893" y="3000307"/>
+                  </a:lnTo>
+                  <a:lnTo>
+                    <a:pt x="4384515" y="3015904"/>
+                  </a:lnTo>
+                  <a:lnTo>
+                    <a:pt x="4456138" y="3030999"/>
+                  </a:lnTo>
+                  <a:lnTo>
+                    <a:pt x="4527760" y="3045606"/>
+                  </a:lnTo>
+                  <a:lnTo>
+                    <a:pt x="4599383" y="3059742"/>
+                  </a:lnTo>
+                  <a:lnTo>
+                    <a:pt x="4671005" y="3073422"/>
+                  </a:lnTo>
+                  <a:lnTo>
+                    <a:pt x="4742628" y="3086660"/>
+                  </a:lnTo>
+                  <a:lnTo>
+                    <a:pt x="4814250" y="3099472"/>
+                  </a:lnTo>
+                  <a:lnTo>
+                    <a:pt x="4885873" y="3111870"/>
+                  </a:lnTo>
+                  <a:lnTo>
+                    <a:pt x="4957495" y="3123868"/>
+                  </a:lnTo>
+                  <a:lnTo>
+                    <a:pt x="5029118" y="3135479"/>
+                  </a:lnTo>
+                  <a:lnTo>
+                    <a:pt x="5100740" y="3146715"/>
+                  </a:lnTo>
+                  <a:lnTo>
+                    <a:pt x="5172363" y="3157589"/>
+                  </a:lnTo>
+                  <a:lnTo>
+                    <a:pt x="5243985" y="3168112"/>
+                  </a:lnTo>
+                  <a:lnTo>
+                    <a:pt x="5315608" y="3178295"/>
+                  </a:lnTo>
+                  <a:lnTo>
+                    <a:pt x="5387230" y="3188150"/>
+                  </a:lnTo>
+                  <a:lnTo>
+                    <a:pt x="5458853" y="3197687"/>
+                  </a:lnTo>
+                  <a:lnTo>
+                    <a:pt x="5530475" y="3206917"/>
+                  </a:lnTo>
+                  <a:lnTo>
+                    <a:pt x="5602098" y="3215848"/>
+                  </a:lnTo>
+                  <a:lnTo>
+                    <a:pt x="5673721" y="3224492"/>
+                  </a:lnTo>
+                  <a:lnTo>
+                    <a:pt x="5745343" y="3232856"/>
+                  </a:lnTo>
+                  <a:lnTo>
+                    <a:pt x="5816966" y="3240951"/>
+                  </a:lnTo>
+                  <a:lnTo>
+                    <a:pt x="5888588" y="3248784"/>
+                  </a:lnTo>
+                  <a:lnTo>
+                    <a:pt x="5960211" y="3256365"/>
+                  </a:lnTo>
+                  <a:lnTo>
+                    <a:pt x="6031833" y="3263701"/>
+                  </a:lnTo>
+                  <a:lnTo>
+                    <a:pt x="6103456" y="3270800"/>
+                  </a:lnTo>
+                  <a:lnTo>
+                    <a:pt x="6175078" y="3277671"/>
+                  </a:lnTo>
+                  <a:lnTo>
+                    <a:pt x="6246701" y="3284319"/>
+                  </a:lnTo>
+                  <a:lnTo>
+                    <a:pt x="6318323" y="3290754"/>
+                  </a:lnTo>
+                  <a:lnTo>
+                    <a:pt x="6389946" y="3296980"/>
+                  </a:lnTo>
+                  <a:lnTo>
+                    <a:pt x="6461568" y="3303006"/>
+                  </a:lnTo>
+                  <a:lnTo>
+                    <a:pt x="6533191" y="3308837"/>
+                  </a:lnTo>
+                  <a:lnTo>
+                    <a:pt x="6604813" y="3314481"/>
+                  </a:lnTo>
+                  <a:lnTo>
+                    <a:pt x="6676436" y="3319942"/>
+                  </a:lnTo>
+                  <a:lnTo>
+                    <a:pt x="6748058" y="3325227"/>
                   </a:lnTo>
                 </a:path>
               </a:pathLst>
@@ -4873,7 +4867,7 @@
           </p:nvSpPr>
           <p:spPr>
             <a:xfrm>
-              <a:off x="4632789" y="2073503"/>
+              <a:off x="4648520" y="2073503"/>
               <a:ext cx="0" cy="3649639"/>
             </a:xfrm>
             <a:custGeom>
@@ -4916,7 +4910,7 @@
           </p:nvSpPr>
           <p:spPr>
             <a:xfrm>
-              <a:off x="3519238" y="2073503"/>
+              <a:off x="3510041" y="2073503"/>
               <a:ext cx="0" cy="3649639"/>
             </a:xfrm>
             <a:custGeom>
@@ -4959,7 +4953,7 @@
           </p:nvSpPr>
           <p:spPr>
             <a:xfrm>
-              <a:off x="5667105" y="2073503"/>
+              <a:off x="5671562" y="2073503"/>
               <a:ext cx="0" cy="3649639"/>
             </a:xfrm>
             <a:custGeom>
@@ -5232,7 +5226,7 @@
           </p:nvSpPr>
           <p:spPr>
             <a:xfrm>
-              <a:off x="787919" y="5785772"/>
+              <a:off x="789147" y="5785772"/>
               <a:ext cx="161574" cy="80101"/>
             </a:xfrm>
             <a:prstGeom prst="rect">
@@ -5278,7 +5272,7 @@
           </p:nvSpPr>
           <p:spPr>
             <a:xfrm>
-              <a:off x="1701509" y="5785772"/>
+              <a:off x="1701133" y="5785772"/>
               <a:ext cx="161574" cy="80101"/>
             </a:xfrm>
             <a:prstGeom prst="rect">
@@ -5324,7 +5318,7 @@
           </p:nvSpPr>
           <p:spPr>
             <a:xfrm>
-              <a:off x="2615100" y="5785772"/>
+              <a:off x="2613120" y="5785772"/>
               <a:ext cx="161574" cy="80101"/>
             </a:xfrm>
             <a:prstGeom prst="rect">
@@ -5370,7 +5364,7 @@
           </p:nvSpPr>
           <p:spPr>
             <a:xfrm>
-              <a:off x="3528691" y="5785772"/>
+              <a:off x="3525106" y="5785772"/>
               <a:ext cx="161574" cy="80101"/>
             </a:xfrm>
             <a:prstGeom prst="rect">
@@ -5416,7 +5410,7 @@
           </p:nvSpPr>
           <p:spPr>
             <a:xfrm>
-              <a:off x="4442282" y="5785772"/>
+              <a:off x="4437092" y="5785772"/>
               <a:ext cx="161574" cy="80101"/>
             </a:xfrm>
             <a:prstGeom prst="rect">
@@ -5462,7 +5456,7 @@
           </p:nvSpPr>
           <p:spPr>
             <a:xfrm>
-              <a:off x="5405571" y="5785772"/>
+              <a:off x="5398776" y="5785772"/>
               <a:ext cx="62179" cy="80101"/>
             </a:xfrm>
             <a:prstGeom prst="rect">
@@ -5508,7 +5502,7 @@
           </p:nvSpPr>
           <p:spPr>
             <a:xfrm>
-              <a:off x="6288072" y="5785772"/>
+              <a:off x="6279673" y="5785772"/>
               <a:ext cx="124358" cy="80101"/>
             </a:xfrm>
             <a:prstGeom prst="rect">
@@ -5554,7 +5548,7 @@
           </p:nvSpPr>
           <p:spPr>
             <a:xfrm>
-              <a:off x="7201663" y="5785772"/>
+              <a:off x="7191659" y="5785772"/>
               <a:ext cx="124358" cy="80101"/>
             </a:xfrm>
             <a:prstGeom prst="rect">
@@ -5600,7 +5594,7 @@
           </p:nvSpPr>
           <p:spPr>
             <a:xfrm>
-              <a:off x="8115254" y="5785772"/>
+              <a:off x="8103645" y="5785772"/>
               <a:ext cx="124358" cy="80101"/>
             </a:xfrm>
             <a:prstGeom prst="rect">
@@ -5771,7 +5765,7 @@
                   <a:latin typeface="Helvetica"/>
                   <a:cs typeface="Helvetica"/>
                 </a:rPr>
-                <a:t>subHR per 10 % decline: 1.52 (0.94-2.45), p_Bonf = 0.528 (n = 6)  |  per IQR decline (Δ = 23.5 %): 2.67 (0.86-8.24)  |  IQR: [-21.0, 2.5] %</a:t>
+                <a:t>subHR per 10 % decline: 1.52 (0.94-2.45), p_Bonf = 0.528 (n = 6)  |  per IQR decline (Δ = 23.7 %): 2.69 (0.86-8.39)  |  IQR: [-21.1, 2.7] %</a:t>
               </a:r>
             </a:p>
           </p:txBody>
